--- a/docs/pitch/Candor_Pitch.pptx
+++ b/docs/pitch/Candor_Pitch.pptx
@@ -5,22 +5,22 @@
     <p:sldMasterId id="2147483648" r:id="rId1"/>
   </p:sldMasterIdLst>
   <p:sldIdLst>
-    <p:sldId id="256" r:id="rId7"/>
-    <p:sldId id="257" r:id="rId8"/>
-    <p:sldId id="258" r:id="rId9"/>
-    <p:sldId id="259" r:id="rId10"/>
-    <p:sldId id="260" r:id="rId11"/>
-    <p:sldId id="261" r:id="rId12"/>
-    <p:sldId id="262" r:id="rId13"/>
-    <p:sldId id="263" r:id="rId14"/>
-    <p:sldId id="264" r:id="rId15"/>
-    <p:sldId id="265" r:id="rId16"/>
-    <p:sldId id="266" r:id="rId17"/>
-    <p:sldId id="267" r:id="rId18"/>
-    <p:sldId id="268" r:id="rId19"/>
-    <p:sldId id="269" r:id="rId20"/>
+    <p:sldId id="256" r:id="rId2"/>
+    <p:sldId id="257" r:id="rId3"/>
+    <p:sldId id="258" r:id="rId4"/>
+    <p:sldId id="259" r:id="rId5"/>
+    <p:sldId id="260" r:id="rId6"/>
+    <p:sldId id="261" r:id="rId7"/>
+    <p:sldId id="262" r:id="rId8"/>
+    <p:sldId id="263" r:id="rId9"/>
+    <p:sldId id="264" r:id="rId10"/>
+    <p:sldId id="265" r:id="rId11"/>
+    <p:sldId id="266" r:id="rId12"/>
+    <p:sldId id="267" r:id="rId13"/>
+    <p:sldId id="268" r:id="rId14"/>
+    <p:sldId id="269" r:id="rId15"/>
   </p:sldIdLst>
-  <p:sldSz cx="12191695" cy="6858000" type="screen4x3"/>
+  <p:sldSz cx="12192000" cy="6858000"/>
   <p:notesSz cx="6858000" cy="9144000"/>
   <p:defaultTextStyle>
     <a:defPPr>
@@ -117,6 +117,22 @@
       </a:defRPr>
     </a:lvl9pPr>
   </p:defaultTextStyle>
+  <p:extLst>
+    <p:ext uri="{EFAFB233-063F-42B5-8137-9DF3F51BA10A}">
+      <p15:sldGuideLst xmlns:p15="http://schemas.microsoft.com/office/powerpoint/2012/main">
+        <p15:guide id="1" orient="horz" pos="2160">
+          <p15:clr>
+            <a:srgbClr val="A4A3A4"/>
+          </p15:clr>
+        </p15:guide>
+        <p15:guide id="2" pos="2880">
+          <p15:clr>
+            <a:srgbClr val="A4A3A4"/>
+          </p15:clr>
+        </p15:guide>
+      </p15:sldGuideLst>
+    </p:ext>
+  </p:extLst>
 </p:presentation>
 </file>
 
@@ -158,10 +174,9 @@
           <a:lstStyle/>
           <a:p>
             <a:r>
-              <a:rPr lang="en-US" smtClean="0"/>
+              <a:rPr lang="en-US"/>
               <a:t>Click to edit Master title style</a:t>
             </a:r>
-            <a:endParaRPr lang="en-US"/>
           </a:p>
         </p:txBody>
       </p:sp>
@@ -277,10 +292,9 @@
           </a:lstStyle>
           <a:p>
             <a:r>
-              <a:rPr lang="en-US" smtClean="0"/>
+              <a:rPr lang="en-US"/>
               <a:t>Click to edit Master subtitle style</a:t>
             </a:r>
-            <a:endParaRPr lang="en-US"/>
           </a:p>
         </p:txBody>
       </p:sp>
@@ -301,7 +315,7 @@
           <a:p>
             <a:fld id="{5BCAD085-E8A6-8845-BD4E-CB4CCA059FC4}" type="datetimeFigureOut">
               <a:rPr lang="en-US" smtClean="0"/>
-              <a:t>1/27/13</a:t>
+              <a:t>9/15/2026</a:t>
             </a:fld>
             <a:endParaRPr lang="en-US"/>
           </a:p>
@@ -395,10 +409,9 @@
           <a:lstStyle/>
           <a:p>
             <a:r>
-              <a:rPr lang="en-US" smtClean="0"/>
+              <a:rPr lang="en-US"/>
               <a:t>Click to edit Master title style</a:t>
             </a:r>
-            <a:endParaRPr lang="en-US"/>
           </a:p>
         </p:txBody>
       </p:sp>
@@ -419,38 +432,37 @@
           <a:p>
             <a:pPr lvl="0"/>
             <a:r>
-              <a:rPr lang="en-US" smtClean="0"/>
+              <a:rPr lang="en-US"/>
               <a:t>Click to edit Master text styles</a:t>
             </a:r>
           </a:p>
           <a:p>
             <a:pPr lvl="1"/>
             <a:r>
-              <a:rPr lang="en-US" smtClean="0"/>
+              <a:rPr lang="en-US"/>
               <a:t>Second level</a:t>
             </a:r>
           </a:p>
           <a:p>
             <a:pPr lvl="2"/>
             <a:r>
-              <a:rPr lang="en-US" smtClean="0"/>
+              <a:rPr lang="en-US"/>
               <a:t>Third level</a:t>
             </a:r>
           </a:p>
           <a:p>
             <a:pPr lvl="3"/>
             <a:r>
-              <a:rPr lang="en-US" smtClean="0"/>
+              <a:rPr lang="en-US"/>
               <a:t>Fourth level</a:t>
             </a:r>
           </a:p>
           <a:p>
             <a:pPr lvl="4"/>
             <a:r>
-              <a:rPr lang="en-US" smtClean="0"/>
+              <a:rPr lang="en-US"/>
               <a:t>Fifth level</a:t>
             </a:r>
-            <a:endParaRPr lang="en-US"/>
           </a:p>
         </p:txBody>
       </p:sp>
@@ -471,7 +483,7 @@
           <a:p>
             <a:fld id="{5BCAD085-E8A6-8845-BD4E-CB4CCA059FC4}" type="datetimeFigureOut">
               <a:rPr lang="en-US" smtClean="0"/>
-              <a:t>1/27/13</a:t>
+              <a:t>9/15/2026</a:t>
             </a:fld>
             <a:endParaRPr lang="en-US"/>
           </a:p>
@@ -570,10 +582,9 @@
           <a:lstStyle/>
           <a:p>
             <a:r>
-              <a:rPr lang="en-US" smtClean="0"/>
+              <a:rPr lang="en-US"/>
               <a:t>Click to edit Master title style</a:t>
             </a:r>
-            <a:endParaRPr lang="en-US"/>
           </a:p>
         </p:txBody>
       </p:sp>
@@ -599,38 +610,37 @@
           <a:p>
             <a:pPr lvl="0"/>
             <a:r>
-              <a:rPr lang="en-US" smtClean="0"/>
+              <a:rPr lang="en-US"/>
               <a:t>Click to edit Master text styles</a:t>
             </a:r>
           </a:p>
           <a:p>
             <a:pPr lvl="1"/>
             <a:r>
-              <a:rPr lang="en-US" smtClean="0"/>
+              <a:rPr lang="en-US"/>
               <a:t>Second level</a:t>
             </a:r>
           </a:p>
           <a:p>
             <a:pPr lvl="2"/>
             <a:r>
-              <a:rPr lang="en-US" smtClean="0"/>
+              <a:rPr lang="en-US"/>
               <a:t>Third level</a:t>
             </a:r>
           </a:p>
           <a:p>
             <a:pPr lvl="3"/>
             <a:r>
-              <a:rPr lang="en-US" smtClean="0"/>
+              <a:rPr lang="en-US"/>
               <a:t>Fourth level</a:t>
             </a:r>
           </a:p>
           <a:p>
             <a:pPr lvl="4"/>
             <a:r>
-              <a:rPr lang="en-US" smtClean="0"/>
+              <a:rPr lang="en-US"/>
               <a:t>Fifth level</a:t>
             </a:r>
-            <a:endParaRPr lang="en-US"/>
           </a:p>
         </p:txBody>
       </p:sp>
@@ -651,7 +661,7 @@
           <a:p>
             <a:fld id="{5BCAD085-E8A6-8845-BD4E-CB4CCA059FC4}" type="datetimeFigureOut">
               <a:rPr lang="en-US" smtClean="0"/>
-              <a:t>1/27/13</a:t>
+              <a:t>9/15/2026</a:t>
             </a:fld>
             <a:endParaRPr lang="en-US"/>
           </a:p>
@@ -745,10 +755,9 @@
           <a:lstStyle/>
           <a:p>
             <a:r>
-              <a:rPr lang="en-US" smtClean="0"/>
+              <a:rPr lang="en-US"/>
               <a:t>Click to edit Master title style</a:t>
             </a:r>
-            <a:endParaRPr lang="en-US"/>
           </a:p>
         </p:txBody>
       </p:sp>
@@ -769,38 +778,37 @@
           <a:p>
             <a:pPr lvl="0"/>
             <a:r>
-              <a:rPr lang="en-US" smtClean="0"/>
+              <a:rPr lang="en-US"/>
               <a:t>Click to edit Master text styles</a:t>
             </a:r>
           </a:p>
           <a:p>
             <a:pPr lvl="1"/>
             <a:r>
-              <a:rPr lang="en-US" smtClean="0"/>
+              <a:rPr lang="en-US"/>
               <a:t>Second level</a:t>
             </a:r>
           </a:p>
           <a:p>
             <a:pPr lvl="2"/>
             <a:r>
-              <a:rPr lang="en-US" smtClean="0"/>
+              <a:rPr lang="en-US"/>
               <a:t>Third level</a:t>
             </a:r>
           </a:p>
           <a:p>
             <a:pPr lvl="3"/>
             <a:r>
-              <a:rPr lang="en-US" smtClean="0"/>
+              <a:rPr lang="en-US"/>
               <a:t>Fourth level</a:t>
             </a:r>
           </a:p>
           <a:p>
             <a:pPr lvl="4"/>
             <a:r>
-              <a:rPr lang="en-US" smtClean="0"/>
+              <a:rPr lang="en-US"/>
               <a:t>Fifth level</a:t>
             </a:r>
-            <a:endParaRPr lang="en-US"/>
           </a:p>
         </p:txBody>
       </p:sp>
@@ -821,7 +829,7 @@
           <a:p>
             <a:fld id="{5BCAD085-E8A6-8845-BD4E-CB4CCA059FC4}" type="datetimeFigureOut">
               <a:rPr lang="en-US" smtClean="0"/>
-              <a:t>1/27/13</a:t>
+              <a:t>9/15/2026</a:t>
             </a:fld>
             <a:endParaRPr lang="en-US"/>
           </a:p>
@@ -924,10 +932,9 @@
           </a:lstStyle>
           <a:p>
             <a:r>
-              <a:rPr lang="en-US" smtClean="0"/>
+              <a:rPr lang="en-US"/>
               <a:t>Click to edit Master title style</a:t>
             </a:r>
-            <a:endParaRPr lang="en-US"/>
           </a:p>
         </p:txBody>
       </p:sp>
@@ -1044,7 +1051,7 @@
           <a:p>
             <a:pPr lvl="0"/>
             <a:r>
-              <a:rPr lang="en-US" smtClean="0"/>
+              <a:rPr lang="en-US"/>
               <a:t>Click to edit Master text styles</a:t>
             </a:r>
           </a:p>
@@ -1067,7 +1074,7 @@
           <a:p>
             <a:fld id="{5BCAD085-E8A6-8845-BD4E-CB4CCA059FC4}" type="datetimeFigureOut">
               <a:rPr lang="en-US" smtClean="0"/>
-              <a:t>1/27/13</a:t>
+              <a:t>9/15/2026</a:t>
             </a:fld>
             <a:endParaRPr lang="en-US"/>
           </a:p>
@@ -1161,10 +1168,9 @@
           <a:lstStyle/>
           <a:p>
             <a:r>
-              <a:rPr lang="en-US" smtClean="0"/>
+              <a:rPr lang="en-US"/>
               <a:t>Click to edit Master title style</a:t>
             </a:r>
-            <a:endParaRPr lang="en-US"/>
           </a:p>
         </p:txBody>
       </p:sp>
@@ -1218,38 +1224,37 @@
           <a:p>
             <a:pPr lvl="0"/>
             <a:r>
-              <a:rPr lang="en-US" smtClean="0"/>
+              <a:rPr lang="en-US"/>
               <a:t>Click to edit Master text styles</a:t>
             </a:r>
           </a:p>
           <a:p>
             <a:pPr lvl="1"/>
             <a:r>
-              <a:rPr lang="en-US" smtClean="0"/>
+              <a:rPr lang="en-US"/>
               <a:t>Second level</a:t>
             </a:r>
           </a:p>
           <a:p>
             <a:pPr lvl="2"/>
             <a:r>
-              <a:rPr lang="en-US" smtClean="0"/>
+              <a:rPr lang="en-US"/>
               <a:t>Third level</a:t>
             </a:r>
           </a:p>
           <a:p>
             <a:pPr lvl="3"/>
             <a:r>
-              <a:rPr lang="en-US" smtClean="0"/>
+              <a:rPr lang="en-US"/>
               <a:t>Fourth level</a:t>
             </a:r>
           </a:p>
           <a:p>
             <a:pPr lvl="4"/>
             <a:r>
-              <a:rPr lang="en-US" smtClean="0"/>
+              <a:rPr lang="en-US"/>
               <a:t>Fifth level</a:t>
             </a:r>
-            <a:endParaRPr lang="en-US"/>
           </a:p>
         </p:txBody>
       </p:sp>
@@ -1303,38 +1308,37 @@
           <a:p>
             <a:pPr lvl="0"/>
             <a:r>
-              <a:rPr lang="en-US" smtClean="0"/>
+              <a:rPr lang="en-US"/>
               <a:t>Click to edit Master text styles</a:t>
             </a:r>
           </a:p>
           <a:p>
             <a:pPr lvl="1"/>
             <a:r>
-              <a:rPr lang="en-US" smtClean="0"/>
+              <a:rPr lang="en-US"/>
               <a:t>Second level</a:t>
             </a:r>
           </a:p>
           <a:p>
             <a:pPr lvl="2"/>
             <a:r>
-              <a:rPr lang="en-US" smtClean="0"/>
+              <a:rPr lang="en-US"/>
               <a:t>Third level</a:t>
             </a:r>
           </a:p>
           <a:p>
             <a:pPr lvl="3"/>
             <a:r>
-              <a:rPr lang="en-US" smtClean="0"/>
+              <a:rPr lang="en-US"/>
               <a:t>Fourth level</a:t>
             </a:r>
           </a:p>
           <a:p>
             <a:pPr lvl="4"/>
             <a:r>
-              <a:rPr lang="en-US" smtClean="0"/>
+              <a:rPr lang="en-US"/>
               <a:t>Fifth level</a:t>
             </a:r>
-            <a:endParaRPr lang="en-US"/>
           </a:p>
         </p:txBody>
       </p:sp>
@@ -1355,7 +1359,7 @@
           <a:p>
             <a:fld id="{5BCAD085-E8A6-8845-BD4E-CB4CCA059FC4}" type="datetimeFigureOut">
               <a:rPr lang="en-US" smtClean="0"/>
-              <a:t>1/27/13</a:t>
+              <a:t>9/15/2026</a:t>
             </a:fld>
             <a:endParaRPr lang="en-US"/>
           </a:p>
@@ -1453,10 +1457,9 @@
           </a:lstStyle>
           <a:p>
             <a:r>
-              <a:rPr lang="en-US" smtClean="0"/>
+              <a:rPr lang="en-US"/>
               <a:t>Click to edit Master title style</a:t>
             </a:r>
-            <a:endParaRPr lang="en-US"/>
           </a:p>
         </p:txBody>
       </p:sp>
@@ -1519,7 +1522,7 @@
           <a:p>
             <a:pPr lvl="0"/>
             <a:r>
-              <a:rPr lang="en-US" smtClean="0"/>
+              <a:rPr lang="en-US"/>
               <a:t>Click to edit Master text styles</a:t>
             </a:r>
           </a:p>
@@ -1575,38 +1578,37 @@
           <a:p>
             <a:pPr lvl="0"/>
             <a:r>
-              <a:rPr lang="en-US" smtClean="0"/>
+              <a:rPr lang="en-US"/>
               <a:t>Click to edit Master text styles</a:t>
             </a:r>
           </a:p>
           <a:p>
             <a:pPr lvl="1"/>
             <a:r>
-              <a:rPr lang="en-US" smtClean="0"/>
+              <a:rPr lang="en-US"/>
               <a:t>Second level</a:t>
             </a:r>
           </a:p>
           <a:p>
             <a:pPr lvl="2"/>
             <a:r>
-              <a:rPr lang="en-US" smtClean="0"/>
+              <a:rPr lang="en-US"/>
               <a:t>Third level</a:t>
             </a:r>
           </a:p>
           <a:p>
             <a:pPr lvl="3"/>
             <a:r>
-              <a:rPr lang="en-US" smtClean="0"/>
+              <a:rPr lang="en-US"/>
               <a:t>Fourth level</a:t>
             </a:r>
           </a:p>
           <a:p>
             <a:pPr lvl="4"/>
             <a:r>
-              <a:rPr lang="en-US" smtClean="0"/>
+              <a:rPr lang="en-US"/>
               <a:t>Fifth level</a:t>
             </a:r>
-            <a:endParaRPr lang="en-US"/>
           </a:p>
         </p:txBody>
       </p:sp>
@@ -1669,7 +1671,7 @@
           <a:p>
             <a:pPr lvl="0"/>
             <a:r>
-              <a:rPr lang="en-US" smtClean="0"/>
+              <a:rPr lang="en-US"/>
               <a:t>Click to edit Master text styles</a:t>
             </a:r>
           </a:p>
@@ -1725,38 +1727,37 @@
           <a:p>
             <a:pPr lvl="0"/>
             <a:r>
-              <a:rPr lang="en-US" smtClean="0"/>
+              <a:rPr lang="en-US"/>
               <a:t>Click to edit Master text styles</a:t>
             </a:r>
           </a:p>
           <a:p>
             <a:pPr lvl="1"/>
             <a:r>
-              <a:rPr lang="en-US" smtClean="0"/>
+              <a:rPr lang="en-US"/>
               <a:t>Second level</a:t>
             </a:r>
           </a:p>
           <a:p>
             <a:pPr lvl="2"/>
             <a:r>
-              <a:rPr lang="en-US" smtClean="0"/>
+              <a:rPr lang="en-US"/>
               <a:t>Third level</a:t>
             </a:r>
           </a:p>
           <a:p>
             <a:pPr lvl="3"/>
             <a:r>
-              <a:rPr lang="en-US" smtClean="0"/>
+              <a:rPr lang="en-US"/>
               <a:t>Fourth level</a:t>
             </a:r>
           </a:p>
           <a:p>
             <a:pPr lvl="4"/>
             <a:r>
-              <a:rPr lang="en-US" smtClean="0"/>
+              <a:rPr lang="en-US"/>
               <a:t>Fifth level</a:t>
             </a:r>
-            <a:endParaRPr lang="en-US"/>
           </a:p>
         </p:txBody>
       </p:sp>
@@ -1777,7 +1778,7 @@
           <a:p>
             <a:fld id="{5BCAD085-E8A6-8845-BD4E-CB4CCA059FC4}" type="datetimeFigureOut">
               <a:rPr lang="en-US" smtClean="0"/>
-              <a:t>1/27/13</a:t>
+              <a:t>9/15/2026</a:t>
             </a:fld>
             <a:endParaRPr lang="en-US"/>
           </a:p>
@@ -1871,10 +1872,9 @@
           <a:lstStyle/>
           <a:p>
             <a:r>
-              <a:rPr lang="en-US" smtClean="0"/>
+              <a:rPr lang="en-US"/>
               <a:t>Click to edit Master title style</a:t>
             </a:r>
-            <a:endParaRPr lang="en-US"/>
           </a:p>
         </p:txBody>
       </p:sp>
@@ -1895,7 +1895,7 @@
           <a:p>
             <a:fld id="{5BCAD085-E8A6-8845-BD4E-CB4CCA059FC4}" type="datetimeFigureOut">
               <a:rPr lang="en-US" smtClean="0"/>
-              <a:t>1/27/13</a:t>
+              <a:t>9/15/2026</a:t>
             </a:fld>
             <a:endParaRPr lang="en-US"/>
           </a:p>
@@ -1990,7 +1990,7 @@
           <a:p>
             <a:fld id="{5BCAD085-E8A6-8845-BD4E-CB4CCA059FC4}" type="datetimeFigureOut">
               <a:rPr lang="en-US" smtClean="0"/>
-              <a:t>1/27/13</a:t>
+              <a:t>9/15/2026</a:t>
             </a:fld>
             <a:endParaRPr lang="en-US"/>
           </a:p>
@@ -2093,10 +2093,9 @@
           </a:lstStyle>
           <a:p>
             <a:r>
-              <a:rPr lang="en-US" smtClean="0"/>
+              <a:rPr lang="en-US"/>
               <a:t>Click to edit Master title style</a:t>
             </a:r>
-            <a:endParaRPr lang="en-US"/>
           </a:p>
         </p:txBody>
       </p:sp>
@@ -2150,38 +2149,37 @@
           <a:p>
             <a:pPr lvl="0"/>
             <a:r>
-              <a:rPr lang="en-US" smtClean="0"/>
+              <a:rPr lang="en-US"/>
               <a:t>Click to edit Master text styles</a:t>
             </a:r>
           </a:p>
           <a:p>
             <a:pPr lvl="1"/>
             <a:r>
-              <a:rPr lang="en-US" smtClean="0"/>
+              <a:rPr lang="en-US"/>
               <a:t>Second level</a:t>
             </a:r>
           </a:p>
           <a:p>
             <a:pPr lvl="2"/>
             <a:r>
-              <a:rPr lang="en-US" smtClean="0"/>
+              <a:rPr lang="en-US"/>
               <a:t>Third level</a:t>
             </a:r>
           </a:p>
           <a:p>
             <a:pPr lvl="3"/>
             <a:r>
-              <a:rPr lang="en-US" smtClean="0"/>
+              <a:rPr lang="en-US"/>
               <a:t>Fourth level</a:t>
             </a:r>
           </a:p>
           <a:p>
             <a:pPr lvl="4"/>
             <a:r>
-              <a:rPr lang="en-US" smtClean="0"/>
+              <a:rPr lang="en-US"/>
               <a:t>Fifth level</a:t>
             </a:r>
-            <a:endParaRPr lang="en-US"/>
           </a:p>
         </p:txBody>
       </p:sp>
@@ -2244,7 +2242,7 @@
           <a:p>
             <a:pPr lvl="0"/>
             <a:r>
-              <a:rPr lang="en-US" smtClean="0"/>
+              <a:rPr lang="en-US"/>
               <a:t>Click to edit Master text styles</a:t>
             </a:r>
           </a:p>
@@ -2267,7 +2265,7 @@
           <a:p>
             <a:fld id="{5BCAD085-E8A6-8845-BD4E-CB4CCA059FC4}" type="datetimeFigureOut">
               <a:rPr lang="en-US" smtClean="0"/>
-              <a:t>1/27/13</a:t>
+              <a:t>9/15/2026</a:t>
             </a:fld>
             <a:endParaRPr lang="en-US"/>
           </a:p>
@@ -2370,10 +2368,9 @@
           </a:lstStyle>
           <a:p>
             <a:r>
-              <a:rPr lang="en-US" smtClean="0"/>
+              <a:rPr lang="en-US"/>
               <a:t>Click to edit Master title style</a:t>
             </a:r>
-            <a:endParaRPr lang="en-US"/>
           </a:p>
         </p:txBody>
       </p:sp>
@@ -2497,7 +2494,7 @@
           <a:p>
             <a:pPr lvl="0"/>
             <a:r>
-              <a:rPr lang="en-US" smtClean="0"/>
+              <a:rPr lang="en-US"/>
               <a:t>Click to edit Master text styles</a:t>
             </a:r>
           </a:p>
@@ -2520,7 +2517,7 @@
           <a:p>
             <a:fld id="{5BCAD085-E8A6-8845-BD4E-CB4CCA059FC4}" type="datetimeFigureOut">
               <a:rPr lang="en-US" smtClean="0"/>
-              <a:t>1/27/13</a:t>
+              <a:t>9/15/2026</a:t>
             </a:fld>
             <a:endParaRPr lang="en-US"/>
           </a:p>
@@ -2629,10 +2626,9 @@
           <a:lstStyle/>
           <a:p>
             <a:r>
-              <a:rPr lang="en-US" smtClean="0"/>
+              <a:rPr lang="en-US"/>
               <a:t>Click to edit Master title style</a:t>
             </a:r>
-            <a:endParaRPr lang="en-US"/>
           </a:p>
         </p:txBody>
       </p:sp>
@@ -2663,38 +2659,37 @@
           <a:p>
             <a:pPr lvl="0"/>
             <a:r>
-              <a:rPr lang="en-US" smtClean="0"/>
+              <a:rPr lang="en-US"/>
               <a:t>Click to edit Master text styles</a:t>
             </a:r>
           </a:p>
           <a:p>
             <a:pPr lvl="1"/>
             <a:r>
-              <a:rPr lang="en-US" smtClean="0"/>
+              <a:rPr lang="en-US"/>
               <a:t>Second level</a:t>
             </a:r>
           </a:p>
           <a:p>
             <a:pPr lvl="2"/>
             <a:r>
-              <a:rPr lang="en-US" smtClean="0"/>
+              <a:rPr lang="en-US"/>
               <a:t>Third level</a:t>
             </a:r>
           </a:p>
           <a:p>
             <a:pPr lvl="3"/>
             <a:r>
-              <a:rPr lang="en-US" smtClean="0"/>
+              <a:rPr lang="en-US"/>
               <a:t>Fourth level</a:t>
             </a:r>
           </a:p>
           <a:p>
             <a:pPr lvl="4"/>
             <a:r>
-              <a:rPr lang="en-US" smtClean="0"/>
+              <a:rPr lang="en-US"/>
               <a:t>Fifth level</a:t>
             </a:r>
-            <a:endParaRPr lang="en-US"/>
           </a:p>
         </p:txBody>
       </p:sp>
@@ -2733,7 +2728,7 @@
           <a:p>
             <a:fld id="{5BCAD085-E8A6-8845-BD4E-CB4CCA059FC4}" type="datetimeFigureOut">
               <a:rPr lang="en-US" smtClean="0"/>
-              <a:t>1/27/13</a:t>
+              <a:t>9/15/2026</a:t>
             </a:fld>
             <a:endParaRPr lang="en-US"/>
           </a:p>
@@ -3092,7 +3087,7 @@
 </file>
 
 <file path=ppt/slides/slide1.xml><?xml version="1.0" encoding="utf-8"?>
-<p:sld xmlns:a="http://schemas.openxmlformats.org/drawingml/2006/main" xmlns:p="http://schemas.openxmlformats.org/presentationml/2006/main" xmlns:r="http://schemas.openxmlformats.org/officeDocument/2006/relationships">
+<p:sld xmlns:a="http://schemas.openxmlformats.org/drawingml/2006/main" xmlns:r="http://schemas.openxmlformats.org/officeDocument/2006/relationships" xmlns:p="http://schemas.openxmlformats.org/presentationml/2006/main">
   <p:cSld>
     <p:spTree>
       <p:nvGrpSpPr>
@@ -3100,7 +3095,14 @@
         <p:cNvGrpSpPr/>
         <p:nvPr/>
       </p:nvGrpSpPr>
-      <p:grpSpPr/>
+      <p:grpSpPr>
+        <a:xfrm>
+          <a:off x="0" y="0"/>
+          <a:ext cx="0" cy="0"/>
+          <a:chOff x="0" y="0"/>
+          <a:chExt cx="0" cy="0"/>
+        </a:xfrm>
+      </p:grpSpPr>
       <p:sp>
         <p:nvSpPr>
           <p:cNvPr id="2" name="Rectangle 1"/>
@@ -3142,6 +3144,7 @@
           <a:lstStyle/>
           <a:p>
             <a:pPr algn="ctr"/>
+            <a:endParaRPr/>
           </a:p>
         </p:txBody>
       </p:sp>
@@ -3186,6 +3189,7 @@
           <a:lstStyle/>
           <a:p>
             <a:pPr algn="ctr"/>
+            <a:endParaRPr/>
           </a:p>
         </p:txBody>
       </p:sp>
@@ -3230,7 +3234,7 @@
           <a:noFill/>
         </p:spPr>
         <p:txBody>
-          <a:bodyPr wrap="square" anchor="t" lIns="0" rIns="0" tIns="0" bIns="0">
+          <a:bodyPr wrap="square" lIns="0" tIns="0" rIns="0" bIns="0" anchor="t">
             <a:spAutoFit/>
           </a:bodyPr>
           <a:lstStyle/>
@@ -3269,7 +3273,7 @@
           <a:noFill/>
         </p:spPr>
         <p:txBody>
-          <a:bodyPr wrap="square" anchor="t" lIns="0" rIns="0" tIns="0" bIns="0">
+          <a:bodyPr wrap="square" lIns="0" tIns="0" rIns="0" bIns="0" anchor="t">
             <a:spAutoFit/>
           </a:bodyPr>
           <a:lstStyle/>
@@ -3308,7 +3312,7 @@
           <a:noFill/>
         </p:spPr>
         <p:txBody>
-          <a:bodyPr wrap="square" anchor="t" lIns="0" rIns="0" tIns="0" bIns="0">
+          <a:bodyPr wrap="square" lIns="0" tIns="0" rIns="0" bIns="0" anchor="t">
             <a:spAutoFit/>
           </a:bodyPr>
           <a:lstStyle/>
@@ -3371,7 +3375,7 @@
           </a:fontRef>
         </p:style>
         <p:txBody>
-          <a:bodyPr rtlCol="0" anchor="ctr" wrap="square" lIns="0" rIns="0"/>
+          <a:bodyPr wrap="square" lIns="0" rIns="0" rtlCol="0" anchor="ctr"/>
           <a:lstStyle/>
           <a:p>
             <a:pPr algn="ctr"/>
@@ -3428,7 +3432,7 @@
           </a:fontRef>
         </p:style>
         <p:txBody>
-          <a:bodyPr rtlCol="0" anchor="ctr" wrap="square" lIns="0" rIns="0"/>
+          <a:bodyPr wrap="square" lIns="0" rIns="0" rtlCol="0" anchor="ctr"/>
           <a:lstStyle/>
           <a:p>
             <a:pPr algn="ctr"/>
@@ -3485,7 +3489,7 @@
           </a:fontRef>
         </p:style>
         <p:txBody>
-          <a:bodyPr rtlCol="0" anchor="ctr" wrap="square" lIns="0" rIns="0"/>
+          <a:bodyPr wrap="square" lIns="0" rIns="0" rtlCol="0" anchor="ctr"/>
           <a:lstStyle/>
           <a:p>
             <a:pPr algn="ctr"/>
@@ -3542,7 +3546,7 @@
           </a:fontRef>
         </p:style>
         <p:txBody>
-          <a:bodyPr rtlCol="0" anchor="ctr" wrap="square" lIns="0" rIns="0"/>
+          <a:bodyPr wrap="square" lIns="0" rIns="0" rtlCol="0" anchor="ctr"/>
           <a:lstStyle/>
           <a:p>
             <a:pPr algn="ctr"/>
@@ -3575,7 +3579,7 @@
           <a:noFill/>
         </p:spPr>
         <p:txBody>
-          <a:bodyPr wrap="square" anchor="t" lIns="0" rIns="0" tIns="0" bIns="0">
+          <a:bodyPr wrap="square" lIns="0" tIns="0" rIns="0" bIns="0" anchor="t">
             <a:spAutoFit/>
           </a:bodyPr>
           <a:lstStyle/>
@@ -3606,7 +3610,7 @@
 </file>
 
 <file path=ppt/slides/slide10.xml><?xml version="1.0" encoding="utf-8"?>
-<p:sld xmlns:a="http://schemas.openxmlformats.org/drawingml/2006/main" xmlns:p="http://schemas.openxmlformats.org/presentationml/2006/main" xmlns:r="http://schemas.openxmlformats.org/officeDocument/2006/relationships">
+<p:sld xmlns:a="http://schemas.openxmlformats.org/drawingml/2006/main" xmlns:r="http://schemas.openxmlformats.org/officeDocument/2006/relationships" xmlns:p="http://schemas.openxmlformats.org/presentationml/2006/main">
   <p:cSld>
     <p:spTree>
       <p:nvGrpSpPr>
@@ -3614,7 +3618,14 @@
         <p:cNvGrpSpPr/>
         <p:nvPr/>
       </p:nvGrpSpPr>
-      <p:grpSpPr/>
+      <p:grpSpPr>
+        <a:xfrm>
+          <a:off x="0" y="0"/>
+          <a:ext cx="0" cy="0"/>
+          <a:chOff x="0" y="0"/>
+          <a:chExt cx="0" cy="0"/>
+        </a:xfrm>
+      </p:grpSpPr>
       <p:sp>
         <p:nvSpPr>
           <p:cNvPr id="2" name="Rectangle 1"/>
@@ -3656,6 +3667,7 @@
           <a:lstStyle/>
           <a:p>
             <a:pPr algn="ctr"/>
+            <a:endParaRPr/>
           </a:p>
         </p:txBody>
       </p:sp>
@@ -3676,7 +3688,7 @@
           <a:noFill/>
         </p:spPr>
         <p:txBody>
-          <a:bodyPr wrap="square" anchor="t" lIns="0" rIns="0" tIns="0" bIns="0">
+          <a:bodyPr wrap="square" lIns="0" tIns="0" rIns="0" bIns="0" anchor="t">
             <a:spAutoFit/>
           </a:bodyPr>
           <a:lstStyle/>
@@ -3715,7 +3727,7 @@
           <a:noFill/>
         </p:spPr>
         <p:txBody>
-          <a:bodyPr wrap="square" anchor="t" lIns="0" rIns="0" tIns="0" bIns="0">
+          <a:bodyPr wrap="square" lIns="0" tIns="0" rIns="0" bIns="0" anchor="t">
             <a:spAutoFit/>
           </a:bodyPr>
           <a:lstStyle/>
@@ -3778,6 +3790,7 @@
           <a:lstStyle/>
           <a:p>
             <a:pPr algn="ctr"/>
+            <a:endParaRPr/>
           </a:p>
         </p:txBody>
       </p:sp>
@@ -3798,7 +3811,7 @@
           <a:noFill/>
         </p:spPr>
         <p:txBody>
-          <a:bodyPr wrap="square" anchor="t" lIns="0" rIns="0" tIns="0" bIns="0">
+          <a:bodyPr wrap="square" lIns="0" tIns="0" rIns="0" bIns="0" anchor="t">
             <a:spAutoFit/>
           </a:bodyPr>
           <a:lstStyle/>
@@ -3837,7 +3850,7 @@
           <a:noFill/>
         </p:spPr>
         <p:txBody>
-          <a:bodyPr wrap="square" anchor="t" lIns="0" rIns="0" tIns="0" bIns="0">
+          <a:bodyPr wrap="square" lIns="0" tIns="0" rIns="0" bIns="0" anchor="t">
             <a:spAutoFit/>
           </a:bodyPr>
           <a:lstStyle/>
@@ -3900,10 +3913,11 @@
           </a:fontRef>
         </p:style>
         <p:txBody>
-          <a:bodyPr rtlCol="0" anchor="ctr" wrap="square"/>
+          <a:bodyPr wrap="square" rtlCol="0" anchor="ctr"/>
           <a:lstStyle/>
           <a:p>
             <a:pPr algn="ctr"/>
+            <a:endParaRPr/>
           </a:p>
         </p:txBody>
       </p:sp>
@@ -3924,7 +3938,7 @@
           <a:noFill/>
         </p:spPr>
         <p:txBody>
-          <a:bodyPr wrap="square" anchor="t" lIns="0" rIns="0" tIns="0" bIns="0">
+          <a:bodyPr wrap="square" lIns="0" tIns="0" rIns="0" bIns="0" anchor="t">
             <a:spAutoFit/>
           </a:bodyPr>
           <a:lstStyle/>
@@ -3963,7 +3977,7 @@
           <a:noFill/>
         </p:spPr>
         <p:txBody>
-          <a:bodyPr wrap="square" anchor="t" lIns="0" rIns="0" tIns="0" bIns="0">
+          <a:bodyPr wrap="square" lIns="0" tIns="0" rIns="0" bIns="0" anchor="t">
             <a:spAutoFit/>
           </a:bodyPr>
           <a:lstStyle/>
@@ -4002,7 +4016,7 @@
           <a:noFill/>
         </p:spPr>
         <p:txBody>
-          <a:bodyPr wrap="square" anchor="t" lIns="0" rIns="0" tIns="0" bIns="0">
+          <a:bodyPr wrap="square" lIns="0" tIns="0" rIns="0" bIns="0" anchor="t">
             <a:spAutoFit/>
           </a:bodyPr>
           <a:lstStyle/>
@@ -4103,6 +4117,7 @@
           <a:lstStyle/>
           <a:p>
             <a:pPr algn="ctr"/>
+            <a:endParaRPr/>
           </a:p>
         </p:txBody>
       </p:sp>
@@ -4147,10 +4162,11 @@
           </a:fontRef>
         </p:style>
         <p:txBody>
-          <a:bodyPr rtlCol="0" anchor="ctr" wrap="square"/>
+          <a:bodyPr wrap="square" rtlCol="0" anchor="ctr"/>
           <a:lstStyle/>
           <a:p>
             <a:pPr algn="ctr"/>
+            <a:endParaRPr/>
           </a:p>
         </p:txBody>
       </p:sp>
@@ -4171,7 +4187,7 @@
           <a:noFill/>
         </p:spPr>
         <p:txBody>
-          <a:bodyPr wrap="square" anchor="t" lIns="0" rIns="0" tIns="0" bIns="0">
+          <a:bodyPr wrap="square" lIns="0" tIns="0" rIns="0" bIns="0" anchor="t">
             <a:spAutoFit/>
           </a:bodyPr>
           <a:lstStyle/>
@@ -4210,7 +4226,7 @@
           <a:noFill/>
         </p:spPr>
         <p:txBody>
-          <a:bodyPr wrap="square" anchor="t" lIns="0" rIns="0" tIns="0" bIns="0">
+          <a:bodyPr wrap="square" lIns="0" tIns="0" rIns="0" bIns="0" anchor="t">
             <a:spAutoFit/>
           </a:bodyPr>
           <a:lstStyle/>
@@ -4249,7 +4265,7 @@
           <a:noFill/>
         </p:spPr>
         <p:txBody>
-          <a:bodyPr wrap="square" anchor="t" lIns="0" rIns="0" tIns="0" bIns="0">
+          <a:bodyPr wrap="square" lIns="0" tIns="0" rIns="0" bIns="0" anchor="t">
             <a:spAutoFit/>
           </a:bodyPr>
           <a:lstStyle/>
@@ -4350,6 +4366,7 @@
           <a:lstStyle/>
           <a:p>
             <a:pPr algn="ctr"/>
+            <a:endParaRPr/>
           </a:p>
         </p:txBody>
       </p:sp>
@@ -4394,10 +4411,11 @@
           </a:fontRef>
         </p:style>
         <p:txBody>
-          <a:bodyPr rtlCol="0" anchor="ctr" wrap="square"/>
+          <a:bodyPr wrap="square" rtlCol="0" anchor="ctr"/>
           <a:lstStyle/>
           <a:p>
             <a:pPr algn="ctr"/>
+            <a:endParaRPr/>
           </a:p>
         </p:txBody>
       </p:sp>
@@ -4418,7 +4436,7 @@
           <a:noFill/>
         </p:spPr>
         <p:txBody>
-          <a:bodyPr wrap="square" anchor="t" lIns="0" rIns="0" tIns="0" bIns="0">
+          <a:bodyPr wrap="square" lIns="0" tIns="0" rIns="0" bIns="0" anchor="t">
             <a:spAutoFit/>
           </a:bodyPr>
           <a:lstStyle/>
@@ -4457,7 +4475,7 @@
           <a:noFill/>
         </p:spPr>
         <p:txBody>
-          <a:bodyPr wrap="square" anchor="t" lIns="0" rIns="0" tIns="0" bIns="0">
+          <a:bodyPr wrap="square" lIns="0" tIns="0" rIns="0" bIns="0" anchor="t">
             <a:spAutoFit/>
           </a:bodyPr>
           <a:lstStyle/>
@@ -4496,7 +4514,7 @@
           <a:noFill/>
         </p:spPr>
         <p:txBody>
-          <a:bodyPr wrap="square" anchor="t" lIns="0" rIns="0" tIns="0" bIns="0">
+          <a:bodyPr wrap="square" lIns="0" tIns="0" rIns="0" bIns="0" anchor="t">
             <a:spAutoFit/>
           </a:bodyPr>
           <a:lstStyle/>
@@ -4573,7 +4591,7 @@
           <a:noFill/>
         </p:spPr>
         <p:txBody>
-          <a:bodyPr wrap="square" anchor="t" lIns="0" rIns="0" tIns="0" bIns="0">
+          <a:bodyPr wrap="square" lIns="0" tIns="0" rIns="0" bIns="0" anchor="t">
             <a:spAutoFit/>
           </a:bodyPr>
           <a:lstStyle/>
@@ -4612,7 +4630,7 @@
           <a:noFill/>
         </p:spPr>
         <p:txBody>
-          <a:bodyPr wrap="square" anchor="t" lIns="0" rIns="0" tIns="0" bIns="0">
+          <a:bodyPr wrap="square" lIns="0" tIns="0" rIns="0" bIns="0" anchor="t">
             <a:spAutoFit/>
           </a:bodyPr>
           <a:lstStyle/>
@@ -4651,7 +4669,7 @@
           <a:noFill/>
         </p:spPr>
         <p:txBody>
-          <a:bodyPr wrap="square" anchor="t" lIns="0" rIns="0" tIns="0" bIns="0">
+          <a:bodyPr wrap="square" lIns="0" tIns="0" rIns="0" bIns="0" anchor="t">
             <a:spAutoFit/>
           </a:bodyPr>
           <a:lstStyle/>
@@ -4690,7 +4708,7 @@
           <a:noFill/>
         </p:spPr>
         <p:txBody>
-          <a:bodyPr wrap="square" anchor="t" lIns="0" rIns="0" tIns="0" bIns="0">
+          <a:bodyPr wrap="square" lIns="0" tIns="0" rIns="0" bIns="0" anchor="t">
             <a:spAutoFit/>
           </a:bodyPr>
           <a:lstStyle/>
@@ -4729,7 +4747,7 @@
           <a:noFill/>
         </p:spPr>
         <p:txBody>
-          <a:bodyPr wrap="square" anchor="t" lIns="0" rIns="0" tIns="0" bIns="0">
+          <a:bodyPr wrap="square" lIns="0" tIns="0" rIns="0" bIns="0" anchor="t">
             <a:spAutoFit/>
           </a:bodyPr>
           <a:lstStyle/>
@@ -4768,7 +4786,7 @@
           <a:noFill/>
         </p:spPr>
         <p:txBody>
-          <a:bodyPr wrap="square" anchor="t" lIns="0" rIns="0" tIns="0" bIns="0">
+          <a:bodyPr wrap="square" lIns="0" tIns="0" rIns="0" bIns="0" anchor="t">
             <a:spAutoFit/>
           </a:bodyPr>
           <a:lstStyle/>
@@ -4807,7 +4825,7 @@
           <a:noFill/>
         </p:spPr>
         <p:txBody>
-          <a:bodyPr wrap="square" anchor="t" lIns="0" rIns="0" tIns="0" bIns="0">
+          <a:bodyPr wrap="square" lIns="0" tIns="0" rIns="0" bIns="0" anchor="t">
             <a:spAutoFit/>
           </a:bodyPr>
           <a:lstStyle/>
@@ -4846,7 +4864,7 @@
           <a:noFill/>
         </p:spPr>
         <p:txBody>
-          <a:bodyPr wrap="square" anchor="t" lIns="0" rIns="0" tIns="0" bIns="0">
+          <a:bodyPr wrap="square" lIns="0" tIns="0" rIns="0" bIns="0" anchor="t">
             <a:spAutoFit/>
           </a:bodyPr>
           <a:lstStyle/>
@@ -4885,7 +4903,7 @@
           <a:noFill/>
         </p:spPr>
         <p:txBody>
-          <a:bodyPr wrap="square" anchor="t" lIns="0" rIns="0" tIns="0" bIns="0">
+          <a:bodyPr wrap="square" lIns="0" tIns="0" rIns="0" bIns="0" anchor="t">
             <a:spAutoFit/>
           </a:bodyPr>
           <a:lstStyle/>
@@ -4916,7 +4934,7 @@
 </file>
 
 <file path=ppt/slides/slide11.xml><?xml version="1.0" encoding="utf-8"?>
-<p:sld xmlns:a="http://schemas.openxmlformats.org/drawingml/2006/main" xmlns:p="http://schemas.openxmlformats.org/presentationml/2006/main" xmlns:r="http://schemas.openxmlformats.org/officeDocument/2006/relationships">
+<p:sld xmlns:a="http://schemas.openxmlformats.org/drawingml/2006/main" xmlns:r="http://schemas.openxmlformats.org/officeDocument/2006/relationships" xmlns:p="http://schemas.openxmlformats.org/presentationml/2006/main">
   <p:cSld>
     <p:spTree>
       <p:nvGrpSpPr>
@@ -4924,7 +4942,14 @@
         <p:cNvGrpSpPr/>
         <p:nvPr/>
       </p:nvGrpSpPr>
-      <p:grpSpPr/>
+      <p:grpSpPr>
+        <a:xfrm>
+          <a:off x="0" y="0"/>
+          <a:ext cx="0" cy="0"/>
+          <a:chOff x="0" y="0"/>
+          <a:chExt cx="0" cy="0"/>
+        </a:xfrm>
+      </p:grpSpPr>
       <p:sp>
         <p:nvSpPr>
           <p:cNvPr id="2" name="Rectangle 1"/>
@@ -4966,6 +4991,7 @@
           <a:lstStyle/>
           <a:p>
             <a:pPr algn="ctr"/>
+            <a:endParaRPr/>
           </a:p>
         </p:txBody>
       </p:sp>
@@ -4986,7 +5012,7 @@
           <a:noFill/>
         </p:spPr>
         <p:txBody>
-          <a:bodyPr wrap="square" anchor="t" lIns="0" rIns="0" tIns="0" bIns="0">
+          <a:bodyPr wrap="square" lIns="0" tIns="0" rIns="0" bIns="0" anchor="t">
             <a:spAutoFit/>
           </a:bodyPr>
           <a:lstStyle/>
@@ -5025,7 +5051,7 @@
           <a:noFill/>
         </p:spPr>
         <p:txBody>
-          <a:bodyPr wrap="square" anchor="t" lIns="0" rIns="0" tIns="0" bIns="0">
+          <a:bodyPr wrap="square" lIns="0" tIns="0" rIns="0" bIns="0" anchor="t">
             <a:spAutoFit/>
           </a:bodyPr>
           <a:lstStyle/>
@@ -5088,6 +5114,7 @@
           <a:lstStyle/>
           <a:p>
             <a:pPr algn="ctr"/>
+            <a:endParaRPr/>
           </a:p>
         </p:txBody>
       </p:sp>
@@ -5108,7 +5135,7 @@
           <a:noFill/>
         </p:spPr>
         <p:txBody>
-          <a:bodyPr wrap="square" anchor="t" lIns="0" rIns="0" tIns="0" bIns="0">
+          <a:bodyPr wrap="square" lIns="0" tIns="0" rIns="0" bIns="0" anchor="t">
             <a:spAutoFit/>
           </a:bodyPr>
           <a:lstStyle/>
@@ -5147,7 +5174,7 @@
           <a:noFill/>
         </p:spPr>
         <p:txBody>
-          <a:bodyPr wrap="square" anchor="t" lIns="0" rIns="0" tIns="0" bIns="0">
+          <a:bodyPr wrap="square" lIns="0" tIns="0" rIns="0" bIns="0" anchor="t">
             <a:spAutoFit/>
           </a:bodyPr>
           <a:lstStyle/>
@@ -5210,10 +5237,11 @@
           </a:fontRef>
         </p:style>
         <p:txBody>
-          <a:bodyPr rtlCol="0" anchor="ctr" wrap="square"/>
+          <a:bodyPr wrap="square" rtlCol="0" anchor="ctr"/>
           <a:lstStyle/>
           <a:p>
             <a:pPr algn="ctr"/>
+            <a:endParaRPr/>
           </a:p>
         </p:txBody>
       </p:sp>
@@ -5234,7 +5262,7 @@
           <a:noFill/>
         </p:spPr>
         <p:txBody>
-          <a:bodyPr wrap="square" anchor="t" lIns="0" rIns="0" tIns="0" bIns="0">
+          <a:bodyPr wrap="square" lIns="0" tIns="0" rIns="0" bIns="0" anchor="t">
             <a:spAutoFit/>
           </a:bodyPr>
           <a:lstStyle/>
@@ -5273,7 +5301,7 @@
           <a:noFill/>
         </p:spPr>
         <p:txBody>
-          <a:bodyPr wrap="square" anchor="t" lIns="0" rIns="0" tIns="0" bIns="0">
+          <a:bodyPr wrap="square" lIns="0" tIns="0" rIns="0" bIns="0" anchor="t">
             <a:spAutoFit/>
           </a:bodyPr>
           <a:lstStyle/>
@@ -5336,10 +5364,11 @@
           </a:fontRef>
         </p:style>
         <p:txBody>
-          <a:bodyPr rtlCol="0" anchor="ctr" wrap="square"/>
+          <a:bodyPr wrap="square" rtlCol="0" anchor="ctr"/>
           <a:lstStyle/>
           <a:p>
             <a:pPr algn="ctr"/>
+            <a:endParaRPr/>
           </a:p>
         </p:txBody>
       </p:sp>
@@ -5360,7 +5389,7 @@
           <a:noFill/>
         </p:spPr>
         <p:txBody>
-          <a:bodyPr wrap="square" anchor="t" lIns="0" rIns="0" tIns="0" bIns="0">
+          <a:bodyPr wrap="square" lIns="0" tIns="0" rIns="0" bIns="0" anchor="t">
             <a:spAutoFit/>
           </a:bodyPr>
           <a:lstStyle/>
@@ -5399,7 +5428,7 @@
           <a:noFill/>
         </p:spPr>
         <p:txBody>
-          <a:bodyPr wrap="square" anchor="t" lIns="0" rIns="0" tIns="0" bIns="0">
+          <a:bodyPr wrap="square" lIns="0" tIns="0" rIns="0" bIns="0" anchor="t">
             <a:spAutoFit/>
           </a:bodyPr>
           <a:lstStyle/>
@@ -5462,10 +5491,11 @@
           </a:fontRef>
         </p:style>
         <p:txBody>
-          <a:bodyPr rtlCol="0" anchor="ctr" wrap="square"/>
+          <a:bodyPr wrap="square" rtlCol="0" anchor="ctr"/>
           <a:lstStyle/>
           <a:p>
             <a:pPr algn="ctr"/>
+            <a:endParaRPr/>
           </a:p>
         </p:txBody>
       </p:sp>
@@ -5486,7 +5516,7 @@
           <a:noFill/>
         </p:spPr>
         <p:txBody>
-          <a:bodyPr wrap="square" anchor="t" lIns="0" rIns="0" tIns="0" bIns="0">
+          <a:bodyPr wrap="square" lIns="0" tIns="0" rIns="0" bIns="0" anchor="t">
             <a:spAutoFit/>
           </a:bodyPr>
           <a:lstStyle/>
@@ -5525,7 +5555,7 @@
           <a:noFill/>
         </p:spPr>
         <p:txBody>
-          <a:bodyPr wrap="square" anchor="t" lIns="0" rIns="0" tIns="0" bIns="0">
+          <a:bodyPr wrap="square" lIns="0" tIns="0" rIns="0" bIns="0" anchor="t">
             <a:spAutoFit/>
           </a:bodyPr>
           <a:lstStyle/>
@@ -5588,10 +5618,11 @@
           </a:fontRef>
         </p:style>
         <p:txBody>
-          <a:bodyPr rtlCol="0" anchor="ctr" wrap="square"/>
+          <a:bodyPr wrap="square" rtlCol="0" anchor="ctr"/>
           <a:lstStyle/>
           <a:p>
             <a:pPr algn="ctr"/>
+            <a:endParaRPr/>
           </a:p>
         </p:txBody>
       </p:sp>
@@ -5612,7 +5643,7 @@
           <a:noFill/>
         </p:spPr>
         <p:txBody>
-          <a:bodyPr wrap="square" anchor="t" lIns="0" rIns="0" tIns="0" bIns="0">
+          <a:bodyPr wrap="square" lIns="0" tIns="0" rIns="0" bIns="0" anchor="t">
             <a:spAutoFit/>
           </a:bodyPr>
           <a:lstStyle/>
@@ -5651,7 +5682,7 @@
           <a:noFill/>
         </p:spPr>
         <p:txBody>
-          <a:bodyPr wrap="square" anchor="t" lIns="0" rIns="0" tIns="0" bIns="0">
+          <a:bodyPr wrap="square" lIns="0" tIns="0" rIns="0" bIns="0" anchor="t">
             <a:spAutoFit/>
           </a:bodyPr>
           <a:lstStyle/>
@@ -5714,10 +5745,11 @@
           </a:fontRef>
         </p:style>
         <p:txBody>
-          <a:bodyPr rtlCol="0" anchor="ctr" wrap="square"/>
+          <a:bodyPr wrap="square" rtlCol="0" anchor="ctr"/>
           <a:lstStyle/>
           <a:p>
             <a:pPr algn="ctr"/>
+            <a:endParaRPr/>
           </a:p>
         </p:txBody>
       </p:sp>
@@ -5738,7 +5770,7 @@
           <a:noFill/>
         </p:spPr>
         <p:txBody>
-          <a:bodyPr wrap="square" anchor="t" lIns="0" rIns="0" tIns="0" bIns="0">
+          <a:bodyPr wrap="square" lIns="0" tIns="0" rIns="0" bIns="0" anchor="t">
             <a:spAutoFit/>
           </a:bodyPr>
           <a:lstStyle/>
@@ -5777,7 +5809,7 @@
           <a:noFill/>
         </p:spPr>
         <p:txBody>
-          <a:bodyPr wrap="square" anchor="t" lIns="0" rIns="0" tIns="0" bIns="0">
+          <a:bodyPr wrap="square" lIns="0" tIns="0" rIns="0" bIns="0" anchor="t">
             <a:spAutoFit/>
           </a:bodyPr>
           <a:lstStyle/>
@@ -5840,10 +5872,11 @@
           </a:fontRef>
         </p:style>
         <p:txBody>
-          <a:bodyPr rtlCol="0" anchor="ctr" wrap="square"/>
+          <a:bodyPr wrap="square" rtlCol="0" anchor="ctr"/>
           <a:lstStyle/>
           <a:p>
             <a:pPr algn="ctr"/>
+            <a:endParaRPr/>
           </a:p>
         </p:txBody>
       </p:sp>
@@ -5864,7 +5897,7 @@
           <a:noFill/>
         </p:spPr>
         <p:txBody>
-          <a:bodyPr wrap="square" anchor="t" lIns="0" rIns="0" tIns="0" bIns="0">
+          <a:bodyPr wrap="square" lIns="0" tIns="0" rIns="0" bIns="0" anchor="t">
             <a:spAutoFit/>
           </a:bodyPr>
           <a:lstStyle/>
@@ -5903,7 +5936,7 @@
           <a:noFill/>
         </p:spPr>
         <p:txBody>
-          <a:bodyPr wrap="square" anchor="t" lIns="0" rIns="0" tIns="0" bIns="0">
+          <a:bodyPr wrap="square" lIns="0" tIns="0" rIns="0" bIns="0" anchor="t">
             <a:spAutoFit/>
           </a:bodyPr>
           <a:lstStyle/>
@@ -5942,7 +5975,7 @@
           <a:noFill/>
         </p:spPr>
         <p:txBody>
-          <a:bodyPr wrap="square" anchor="t" lIns="0" rIns="0" tIns="0" bIns="0">
+          <a:bodyPr wrap="square" lIns="0" tIns="0" rIns="0" bIns="0" anchor="t">
             <a:spAutoFit/>
           </a:bodyPr>
           <a:lstStyle/>
@@ -5973,7 +6006,7 @@
 </file>
 
 <file path=ppt/slides/slide12.xml><?xml version="1.0" encoding="utf-8"?>
-<p:sld xmlns:a="http://schemas.openxmlformats.org/drawingml/2006/main" xmlns:p="http://schemas.openxmlformats.org/presentationml/2006/main" xmlns:r="http://schemas.openxmlformats.org/officeDocument/2006/relationships">
+<p:sld xmlns:a="http://schemas.openxmlformats.org/drawingml/2006/main" xmlns:r="http://schemas.openxmlformats.org/officeDocument/2006/relationships" xmlns:p="http://schemas.openxmlformats.org/presentationml/2006/main">
   <p:cSld>
     <p:spTree>
       <p:nvGrpSpPr>
@@ -5981,7 +6014,14 @@
         <p:cNvGrpSpPr/>
         <p:nvPr/>
       </p:nvGrpSpPr>
-      <p:grpSpPr/>
+      <p:grpSpPr>
+        <a:xfrm>
+          <a:off x="0" y="0"/>
+          <a:ext cx="0" cy="0"/>
+          <a:chOff x="0" y="0"/>
+          <a:chExt cx="0" cy="0"/>
+        </a:xfrm>
+      </p:grpSpPr>
       <p:sp>
         <p:nvSpPr>
           <p:cNvPr id="2" name="Rectangle 1"/>
@@ -6023,6 +6063,7 @@
           <a:lstStyle/>
           <a:p>
             <a:pPr algn="ctr"/>
+            <a:endParaRPr/>
           </a:p>
         </p:txBody>
       </p:sp>
@@ -6043,7 +6084,7 @@
           <a:noFill/>
         </p:spPr>
         <p:txBody>
-          <a:bodyPr wrap="square" anchor="t" lIns="0" rIns="0" tIns="0" bIns="0">
+          <a:bodyPr wrap="square" lIns="0" tIns="0" rIns="0" bIns="0" anchor="t">
             <a:spAutoFit/>
           </a:bodyPr>
           <a:lstStyle/>
@@ -6082,7 +6123,7 @@
           <a:noFill/>
         </p:spPr>
         <p:txBody>
-          <a:bodyPr wrap="square" anchor="t" lIns="0" rIns="0" tIns="0" bIns="0">
+          <a:bodyPr wrap="square" lIns="0" tIns="0" rIns="0" bIns="0" anchor="t">
             <a:spAutoFit/>
           </a:bodyPr>
           <a:lstStyle/>
@@ -6145,6 +6186,7 @@
           <a:lstStyle/>
           <a:p>
             <a:pPr algn="ctr"/>
+            <a:endParaRPr/>
           </a:p>
         </p:txBody>
       </p:sp>
@@ -6165,7 +6207,7 @@
           <a:noFill/>
         </p:spPr>
         <p:txBody>
-          <a:bodyPr wrap="square" anchor="t" lIns="0" rIns="0" tIns="0" bIns="0">
+          <a:bodyPr wrap="square" lIns="0" tIns="0" rIns="0" bIns="0" anchor="t">
             <a:spAutoFit/>
           </a:bodyPr>
           <a:lstStyle/>
@@ -6204,7 +6246,7 @@
           <a:noFill/>
         </p:spPr>
         <p:txBody>
-          <a:bodyPr wrap="square" anchor="t" lIns="0" rIns="0" tIns="0" bIns="0">
+          <a:bodyPr wrap="square" lIns="0" tIns="0" rIns="0" bIns="0" anchor="t">
             <a:spAutoFit/>
           </a:bodyPr>
           <a:lstStyle/>
@@ -6267,6 +6309,7 @@
           <a:lstStyle/>
           <a:p>
             <a:pPr algn="ctr"/>
+            <a:endParaRPr/>
           </a:p>
         </p:txBody>
       </p:sp>
@@ -6311,7 +6354,7 @@
           <a:noFill/>
         </p:spPr>
         <p:txBody>
-          <a:bodyPr wrap="square" anchor="t" lIns="0" rIns="0" tIns="0" bIns="0">
+          <a:bodyPr wrap="square" lIns="0" tIns="0" rIns="0" bIns="0" anchor="t">
             <a:spAutoFit/>
           </a:bodyPr>
           <a:lstStyle/>
@@ -6350,7 +6393,7 @@
           <a:noFill/>
         </p:spPr>
         <p:txBody>
-          <a:bodyPr wrap="square" anchor="t" lIns="0" rIns="0" tIns="0" bIns="0">
+          <a:bodyPr wrap="square" lIns="0" tIns="0" rIns="0" bIns="0" anchor="t">
             <a:spAutoFit/>
           </a:bodyPr>
           <a:lstStyle/>
@@ -6389,7 +6432,7 @@
           <a:noFill/>
         </p:spPr>
         <p:txBody>
-          <a:bodyPr wrap="square" anchor="t" lIns="0" rIns="0" tIns="0" bIns="0">
+          <a:bodyPr wrap="square" lIns="0" tIns="0" rIns="0" bIns="0" anchor="t">
             <a:spAutoFit/>
           </a:bodyPr>
           <a:lstStyle/>
@@ -6471,10 +6514,11 @@
           </a:fontRef>
         </p:style>
         <p:txBody>
-          <a:bodyPr rtlCol="0" anchor="ctr" wrap="square"/>
+          <a:bodyPr wrap="square" rtlCol="0" anchor="ctr"/>
           <a:lstStyle/>
           <a:p>
             <a:pPr algn="ctr"/>
+            <a:endParaRPr/>
           </a:p>
         </p:txBody>
       </p:sp>
@@ -6495,7 +6539,7 @@
           <a:noFill/>
         </p:spPr>
         <p:txBody>
-          <a:bodyPr wrap="square" anchor="t" lIns="0" rIns="0" tIns="0" bIns="0">
+          <a:bodyPr wrap="square" lIns="0" tIns="0" rIns="0" bIns="0" anchor="t">
             <a:spAutoFit/>
           </a:bodyPr>
           <a:lstStyle/>
@@ -6534,7 +6578,7 @@
           <a:noFill/>
         </p:spPr>
         <p:txBody>
-          <a:bodyPr wrap="square" anchor="t" lIns="0" rIns="0" tIns="0" bIns="0">
+          <a:bodyPr wrap="square" lIns="0" tIns="0" rIns="0" bIns="0" anchor="t">
             <a:spAutoFit/>
           </a:bodyPr>
           <a:lstStyle/>
@@ -6597,10 +6641,11 @@
           </a:fontRef>
         </p:style>
         <p:txBody>
-          <a:bodyPr rtlCol="0" anchor="ctr" wrap="square"/>
+          <a:bodyPr wrap="square" rtlCol="0" anchor="ctr"/>
           <a:lstStyle/>
           <a:p>
             <a:pPr algn="ctr"/>
+            <a:endParaRPr/>
           </a:p>
         </p:txBody>
       </p:sp>
@@ -6621,7 +6666,7 @@
           <a:noFill/>
         </p:spPr>
         <p:txBody>
-          <a:bodyPr wrap="square" anchor="t" lIns="0" rIns="0" tIns="0" bIns="0">
+          <a:bodyPr wrap="square" lIns="0" tIns="0" rIns="0" bIns="0" anchor="t">
             <a:spAutoFit/>
           </a:bodyPr>
           <a:lstStyle/>
@@ -6660,7 +6705,7 @@
           <a:noFill/>
         </p:spPr>
         <p:txBody>
-          <a:bodyPr wrap="square" anchor="t" lIns="0" rIns="0" tIns="0" bIns="0">
+          <a:bodyPr wrap="square" lIns="0" tIns="0" rIns="0" bIns="0" anchor="t">
             <a:spAutoFit/>
           </a:bodyPr>
           <a:lstStyle/>
@@ -6723,10 +6768,11 @@
           </a:fontRef>
         </p:style>
         <p:txBody>
-          <a:bodyPr rtlCol="0" anchor="ctr" wrap="square"/>
+          <a:bodyPr wrap="square" rtlCol="0" anchor="ctr"/>
           <a:lstStyle/>
           <a:p>
             <a:pPr algn="ctr"/>
+            <a:endParaRPr/>
           </a:p>
         </p:txBody>
       </p:sp>
@@ -6747,7 +6793,7 @@
           <a:noFill/>
         </p:spPr>
         <p:txBody>
-          <a:bodyPr wrap="square" anchor="t" lIns="0" rIns="0" tIns="0" bIns="0">
+          <a:bodyPr wrap="square" lIns="0" tIns="0" rIns="0" bIns="0" anchor="t">
             <a:spAutoFit/>
           </a:bodyPr>
           <a:lstStyle/>
@@ -6786,7 +6832,7 @@
           <a:noFill/>
         </p:spPr>
         <p:txBody>
-          <a:bodyPr wrap="square" anchor="t" lIns="0" rIns="0" tIns="0" bIns="0">
+          <a:bodyPr wrap="square" lIns="0" tIns="0" rIns="0" bIns="0" anchor="t">
             <a:spAutoFit/>
           </a:bodyPr>
           <a:lstStyle/>
@@ -6849,10 +6895,11 @@
           </a:fontRef>
         </p:style>
         <p:txBody>
-          <a:bodyPr rtlCol="0" anchor="ctr" wrap="square"/>
+          <a:bodyPr wrap="square" rtlCol="0" anchor="ctr"/>
           <a:lstStyle/>
           <a:p>
             <a:pPr algn="ctr"/>
+            <a:endParaRPr/>
           </a:p>
         </p:txBody>
       </p:sp>
@@ -6873,7 +6920,7 @@
           <a:noFill/>
         </p:spPr>
         <p:txBody>
-          <a:bodyPr wrap="square" anchor="t" lIns="0" rIns="0" tIns="0" bIns="0">
+          <a:bodyPr wrap="square" lIns="0" tIns="0" rIns="0" bIns="0" anchor="t">
             <a:spAutoFit/>
           </a:bodyPr>
           <a:lstStyle/>
@@ -6912,7 +6959,7 @@
           <a:noFill/>
         </p:spPr>
         <p:txBody>
-          <a:bodyPr wrap="square" anchor="t" lIns="0" rIns="0" tIns="0" bIns="0">
+          <a:bodyPr wrap="square" lIns="0" tIns="0" rIns="0" bIns="0" anchor="t">
             <a:spAutoFit/>
           </a:bodyPr>
           <a:lstStyle/>
@@ -6951,7 +6998,7 @@
           <a:noFill/>
         </p:spPr>
         <p:txBody>
-          <a:bodyPr wrap="square" anchor="t" lIns="0" rIns="0" tIns="0" bIns="0">
+          <a:bodyPr wrap="square" lIns="0" tIns="0" rIns="0" bIns="0" anchor="t">
             <a:spAutoFit/>
           </a:bodyPr>
           <a:lstStyle/>
@@ -6982,7 +7029,7 @@
 </file>
 
 <file path=ppt/slides/slide13.xml><?xml version="1.0" encoding="utf-8"?>
-<p:sld xmlns:a="http://schemas.openxmlformats.org/drawingml/2006/main" xmlns:p="http://schemas.openxmlformats.org/presentationml/2006/main" xmlns:r="http://schemas.openxmlformats.org/officeDocument/2006/relationships">
+<p:sld xmlns:a="http://schemas.openxmlformats.org/drawingml/2006/main" xmlns:r="http://schemas.openxmlformats.org/officeDocument/2006/relationships" xmlns:p="http://schemas.openxmlformats.org/presentationml/2006/main">
   <p:cSld>
     <p:spTree>
       <p:nvGrpSpPr>
@@ -6990,7 +7037,14 @@
         <p:cNvGrpSpPr/>
         <p:nvPr/>
       </p:nvGrpSpPr>
-      <p:grpSpPr/>
+      <p:grpSpPr>
+        <a:xfrm>
+          <a:off x="0" y="0"/>
+          <a:ext cx="0" cy="0"/>
+          <a:chOff x="0" y="0"/>
+          <a:chExt cx="0" cy="0"/>
+        </a:xfrm>
+      </p:grpSpPr>
       <p:sp>
         <p:nvSpPr>
           <p:cNvPr id="2" name="Rectangle 1"/>
@@ -7032,6 +7086,7 @@
           <a:lstStyle/>
           <a:p>
             <a:pPr algn="ctr"/>
+            <a:endParaRPr/>
           </a:p>
         </p:txBody>
       </p:sp>
@@ -7052,7 +7107,7 @@
           <a:noFill/>
         </p:spPr>
         <p:txBody>
-          <a:bodyPr wrap="square" anchor="t" lIns="0" rIns="0" tIns="0" bIns="0">
+          <a:bodyPr wrap="square" lIns="0" tIns="0" rIns="0" bIns="0" anchor="t">
             <a:spAutoFit/>
           </a:bodyPr>
           <a:lstStyle/>
@@ -7091,7 +7146,7 @@
           <a:noFill/>
         </p:spPr>
         <p:txBody>
-          <a:bodyPr wrap="square" anchor="t" lIns="0" rIns="0" tIns="0" bIns="0">
+          <a:bodyPr wrap="square" lIns="0" tIns="0" rIns="0" bIns="0" anchor="t">
             <a:spAutoFit/>
           </a:bodyPr>
           <a:lstStyle/>
@@ -7154,6 +7209,7 @@
           <a:lstStyle/>
           <a:p>
             <a:pPr algn="ctr"/>
+            <a:endParaRPr/>
           </a:p>
         </p:txBody>
       </p:sp>
@@ -7174,7 +7230,7 @@
           <a:noFill/>
         </p:spPr>
         <p:txBody>
-          <a:bodyPr wrap="square" anchor="t" lIns="0" rIns="0" tIns="0" bIns="0">
+          <a:bodyPr wrap="square" lIns="0" tIns="0" rIns="0" bIns="0" anchor="t">
             <a:spAutoFit/>
           </a:bodyPr>
           <a:lstStyle/>
@@ -7237,10 +7293,11 @@
           </a:fontRef>
         </p:style>
         <p:txBody>
-          <a:bodyPr rtlCol="0" anchor="ctr" wrap="square"/>
+          <a:bodyPr wrap="square" rtlCol="0" anchor="ctr"/>
           <a:lstStyle/>
           <a:p>
             <a:pPr algn="ctr"/>
+            <a:endParaRPr/>
           </a:p>
         </p:txBody>
       </p:sp>
@@ -7261,7 +7318,7 @@
           <a:noFill/>
         </p:spPr>
         <p:txBody>
-          <a:bodyPr wrap="square" anchor="t" lIns="0" rIns="0" tIns="0" bIns="0">
+          <a:bodyPr wrap="square" lIns="0" tIns="0" rIns="0" bIns="0" anchor="t">
             <a:spAutoFit/>
           </a:bodyPr>
           <a:lstStyle/>
@@ -7300,7 +7357,7 @@
           <a:noFill/>
         </p:spPr>
         <p:txBody>
-          <a:bodyPr wrap="square" anchor="t" lIns="0" rIns="0" tIns="0" bIns="0">
+          <a:bodyPr wrap="square" lIns="0" tIns="0" rIns="0" bIns="0" anchor="t">
             <a:spAutoFit/>
           </a:bodyPr>
           <a:lstStyle/>
@@ -7363,10 +7420,11 @@
           </a:fontRef>
         </p:style>
         <p:txBody>
-          <a:bodyPr rtlCol="0" anchor="ctr" wrap="square"/>
+          <a:bodyPr wrap="square" rtlCol="0" anchor="ctr"/>
           <a:lstStyle/>
           <a:p>
             <a:pPr algn="ctr"/>
+            <a:endParaRPr/>
           </a:p>
         </p:txBody>
       </p:sp>
@@ -7387,7 +7445,7 @@
           <a:noFill/>
         </p:spPr>
         <p:txBody>
-          <a:bodyPr wrap="square" anchor="t" lIns="0" rIns="0" tIns="0" bIns="0">
+          <a:bodyPr wrap="square" lIns="0" tIns="0" rIns="0" bIns="0" anchor="t">
             <a:spAutoFit/>
           </a:bodyPr>
           <a:lstStyle/>
@@ -7426,7 +7484,7 @@
           <a:noFill/>
         </p:spPr>
         <p:txBody>
-          <a:bodyPr wrap="square" anchor="t" lIns="0" rIns="0" tIns="0" bIns="0">
+          <a:bodyPr wrap="square" lIns="0" tIns="0" rIns="0" bIns="0" anchor="t">
             <a:spAutoFit/>
           </a:bodyPr>
           <a:lstStyle/>
@@ -7489,10 +7547,11 @@
           </a:fontRef>
         </p:style>
         <p:txBody>
-          <a:bodyPr rtlCol="0" anchor="ctr" wrap="square"/>
+          <a:bodyPr wrap="square" rtlCol="0" anchor="ctr"/>
           <a:lstStyle/>
           <a:p>
             <a:pPr algn="ctr"/>
+            <a:endParaRPr/>
           </a:p>
         </p:txBody>
       </p:sp>
@@ -7513,7 +7572,7 @@
           <a:noFill/>
         </p:spPr>
         <p:txBody>
-          <a:bodyPr wrap="square" anchor="t" lIns="0" rIns="0" tIns="0" bIns="0">
+          <a:bodyPr wrap="square" lIns="0" tIns="0" rIns="0" bIns="0" anchor="t">
             <a:spAutoFit/>
           </a:bodyPr>
           <a:lstStyle/>
@@ -7552,7 +7611,7 @@
           <a:noFill/>
         </p:spPr>
         <p:txBody>
-          <a:bodyPr wrap="square" anchor="t" lIns="0" rIns="0" tIns="0" bIns="0">
+          <a:bodyPr wrap="square" lIns="0" tIns="0" rIns="0" bIns="0" anchor="t">
             <a:spAutoFit/>
           </a:bodyPr>
           <a:lstStyle/>
@@ -7615,10 +7674,11 @@
           </a:fontRef>
         </p:style>
         <p:txBody>
-          <a:bodyPr rtlCol="0" anchor="ctr" wrap="square"/>
+          <a:bodyPr wrap="square" rtlCol="0" anchor="ctr"/>
           <a:lstStyle/>
           <a:p>
             <a:pPr algn="ctr"/>
+            <a:endParaRPr/>
           </a:p>
         </p:txBody>
       </p:sp>
@@ -7639,7 +7699,7 @@
           <a:noFill/>
         </p:spPr>
         <p:txBody>
-          <a:bodyPr wrap="square" anchor="t" lIns="0" rIns="0" tIns="0" bIns="0">
+          <a:bodyPr wrap="square" lIns="0" tIns="0" rIns="0" bIns="0" anchor="t">
             <a:spAutoFit/>
           </a:bodyPr>
           <a:lstStyle/>
@@ -7708,7 +7768,7 @@
 </file>
 
 <file path=ppt/slides/slide14.xml><?xml version="1.0" encoding="utf-8"?>
-<p:sld xmlns:a="http://schemas.openxmlformats.org/drawingml/2006/main" xmlns:p="http://schemas.openxmlformats.org/presentationml/2006/main" xmlns:r="http://schemas.openxmlformats.org/officeDocument/2006/relationships">
+<p:sld xmlns:a="http://schemas.openxmlformats.org/drawingml/2006/main" xmlns:r="http://schemas.openxmlformats.org/officeDocument/2006/relationships" xmlns:p="http://schemas.openxmlformats.org/presentationml/2006/main">
   <p:cSld>
     <p:spTree>
       <p:nvGrpSpPr>
@@ -7716,7 +7776,14 @@
         <p:cNvGrpSpPr/>
         <p:nvPr/>
       </p:nvGrpSpPr>
-      <p:grpSpPr/>
+      <p:grpSpPr>
+        <a:xfrm>
+          <a:off x="0" y="0"/>
+          <a:ext cx="0" cy="0"/>
+          <a:chOff x="0" y="0"/>
+          <a:chExt cx="0" cy="0"/>
+        </a:xfrm>
+      </p:grpSpPr>
       <p:sp>
         <p:nvSpPr>
           <p:cNvPr id="2" name="Rectangle 1"/>
@@ -7758,6 +7825,7 @@
           <a:lstStyle/>
           <a:p>
             <a:pPr algn="ctr"/>
+            <a:endParaRPr/>
           </a:p>
         </p:txBody>
       </p:sp>
@@ -7778,7 +7846,7 @@
           <a:noFill/>
         </p:spPr>
         <p:txBody>
-          <a:bodyPr wrap="square" anchor="t" lIns="0" rIns="0" tIns="0" bIns="0">
+          <a:bodyPr wrap="square" lIns="0" tIns="0" rIns="0" bIns="0" anchor="t">
             <a:spAutoFit/>
           </a:bodyPr>
           <a:lstStyle/>
@@ -7817,7 +7885,7 @@
           <a:noFill/>
         </p:spPr>
         <p:txBody>
-          <a:bodyPr wrap="square" anchor="t" lIns="0" rIns="0" tIns="0" bIns="0">
+          <a:bodyPr wrap="square" lIns="0" tIns="0" rIns="0" bIns="0" anchor="t">
             <a:spAutoFit/>
           </a:bodyPr>
           <a:lstStyle/>
@@ -7880,6 +7948,7 @@
           <a:lstStyle/>
           <a:p>
             <a:pPr algn="ctr"/>
+            <a:endParaRPr/>
           </a:p>
         </p:txBody>
       </p:sp>
@@ -7900,7 +7969,7 @@
           <a:noFill/>
         </p:spPr>
         <p:txBody>
-          <a:bodyPr wrap="square" anchor="t" lIns="0" rIns="0" tIns="0" bIns="0">
+          <a:bodyPr wrap="square" lIns="0" tIns="0" rIns="0" bIns="0" anchor="t">
             <a:spAutoFit/>
           </a:bodyPr>
           <a:lstStyle/>
@@ -7939,7 +8008,7 @@
           <a:noFill/>
         </p:spPr>
         <p:txBody>
-          <a:bodyPr wrap="square" anchor="t" lIns="0" rIns="0" tIns="0" bIns="0">
+          <a:bodyPr wrap="square" lIns="0" tIns="0" rIns="0" bIns="0" anchor="t">
             <a:spAutoFit/>
           </a:bodyPr>
           <a:lstStyle/>
@@ -7978,7 +8047,7 @@
           <a:noFill/>
         </p:spPr>
         <p:txBody>
-          <a:bodyPr wrap="square" anchor="t" lIns="0" rIns="0" tIns="0" bIns="0">
+          <a:bodyPr wrap="square" lIns="0" tIns="0" rIns="0" bIns="0" anchor="t">
             <a:spAutoFit/>
           </a:bodyPr>
           <a:lstStyle/>
@@ -8017,7 +8086,7 @@
           <a:noFill/>
         </p:spPr>
         <p:txBody>
-          <a:bodyPr wrap="square" anchor="t" lIns="0" rIns="0" tIns="0" bIns="0">
+          <a:bodyPr wrap="square" lIns="0" tIns="0" rIns="0" bIns="0" anchor="t">
             <a:spAutoFit/>
           </a:bodyPr>
           <a:lstStyle/>
@@ -8056,7 +8125,7 @@
           <a:noFill/>
         </p:spPr>
         <p:txBody>
-          <a:bodyPr wrap="square" anchor="t" lIns="0" rIns="0" tIns="0" bIns="0">
+          <a:bodyPr wrap="square" lIns="0" tIns="0" rIns="0" bIns="0" anchor="t">
             <a:spAutoFit/>
           </a:bodyPr>
           <a:lstStyle/>
@@ -8095,7 +8164,7 @@
           <a:noFill/>
         </p:spPr>
         <p:txBody>
-          <a:bodyPr wrap="square" anchor="t" lIns="0" rIns="0" tIns="0" bIns="0">
+          <a:bodyPr wrap="square" lIns="0" tIns="0" rIns="0" bIns="0" anchor="t">
             <a:spAutoFit/>
           </a:bodyPr>
           <a:lstStyle/>
@@ -8134,7 +8203,7 @@
           <a:noFill/>
         </p:spPr>
         <p:txBody>
-          <a:bodyPr wrap="square" anchor="t" lIns="0" rIns="0" tIns="0" bIns="0">
+          <a:bodyPr wrap="square" lIns="0" tIns="0" rIns="0" bIns="0" anchor="t">
             <a:spAutoFit/>
           </a:bodyPr>
           <a:lstStyle/>
@@ -8173,7 +8242,7 @@
           <a:noFill/>
         </p:spPr>
         <p:txBody>
-          <a:bodyPr wrap="square" anchor="t" lIns="0" rIns="0" tIns="0" bIns="0">
+          <a:bodyPr wrap="square" lIns="0" tIns="0" rIns="0" bIns="0" anchor="t">
             <a:spAutoFit/>
           </a:bodyPr>
           <a:lstStyle/>
@@ -8212,7 +8281,7 @@
           <a:noFill/>
         </p:spPr>
         <p:txBody>
-          <a:bodyPr wrap="square" anchor="t" lIns="0" rIns="0" tIns="0" bIns="0">
+          <a:bodyPr wrap="square" lIns="0" tIns="0" rIns="0" bIns="0" anchor="t">
             <a:spAutoFit/>
           </a:bodyPr>
           <a:lstStyle/>
@@ -8251,7 +8320,7 @@
           <a:noFill/>
         </p:spPr>
         <p:txBody>
-          <a:bodyPr wrap="square" anchor="t" lIns="0" rIns="0" tIns="0" bIns="0">
+          <a:bodyPr wrap="square" lIns="0" tIns="0" rIns="0" bIns="0" anchor="t">
             <a:spAutoFit/>
           </a:bodyPr>
           <a:lstStyle/>
@@ -8290,7 +8359,7 @@
           <a:noFill/>
         </p:spPr>
         <p:txBody>
-          <a:bodyPr wrap="square" anchor="t" lIns="0" rIns="0" tIns="0" bIns="0">
+          <a:bodyPr wrap="square" lIns="0" tIns="0" rIns="0" bIns="0" anchor="t">
             <a:spAutoFit/>
           </a:bodyPr>
           <a:lstStyle/>
@@ -8329,7 +8398,7 @@
           <a:noFill/>
         </p:spPr>
         <p:txBody>
-          <a:bodyPr wrap="square" anchor="t" lIns="0" rIns="0" tIns="0" bIns="0">
+          <a:bodyPr wrap="square" lIns="0" tIns="0" rIns="0" bIns="0" anchor="t">
             <a:spAutoFit/>
           </a:bodyPr>
           <a:lstStyle/>
@@ -8368,7 +8437,7 @@
           <a:noFill/>
         </p:spPr>
         <p:txBody>
-          <a:bodyPr wrap="square" anchor="t" lIns="0" rIns="0" tIns="0" bIns="0">
+          <a:bodyPr wrap="square" lIns="0" tIns="0" rIns="0" bIns="0" anchor="t">
             <a:spAutoFit/>
           </a:bodyPr>
           <a:lstStyle/>
@@ -8399,7 +8468,7 @@
 </file>
 
 <file path=ppt/slides/slide2.xml><?xml version="1.0" encoding="utf-8"?>
-<p:sld xmlns:a="http://schemas.openxmlformats.org/drawingml/2006/main" xmlns:p="http://schemas.openxmlformats.org/presentationml/2006/main" xmlns:r="http://schemas.openxmlformats.org/officeDocument/2006/relationships">
+<p:sld xmlns:a="http://schemas.openxmlformats.org/drawingml/2006/main" xmlns:r="http://schemas.openxmlformats.org/officeDocument/2006/relationships" xmlns:p="http://schemas.openxmlformats.org/presentationml/2006/main">
   <p:cSld>
     <p:spTree>
       <p:nvGrpSpPr>
@@ -8407,7 +8476,14 @@
         <p:cNvGrpSpPr/>
         <p:nvPr/>
       </p:nvGrpSpPr>
-      <p:grpSpPr/>
+      <p:grpSpPr>
+        <a:xfrm>
+          <a:off x="0" y="0"/>
+          <a:ext cx="0" cy="0"/>
+          <a:chOff x="0" y="0"/>
+          <a:chExt cx="0" cy="0"/>
+        </a:xfrm>
+      </p:grpSpPr>
       <p:sp>
         <p:nvSpPr>
           <p:cNvPr id="2" name="Rectangle 1"/>
@@ -8449,6 +8525,7 @@
           <a:lstStyle/>
           <a:p>
             <a:pPr algn="ctr"/>
+            <a:endParaRPr/>
           </a:p>
         </p:txBody>
       </p:sp>
@@ -8469,7 +8546,7 @@
           <a:noFill/>
         </p:spPr>
         <p:txBody>
-          <a:bodyPr wrap="square" anchor="t" lIns="0" rIns="0" tIns="0" bIns="0">
+          <a:bodyPr wrap="square" lIns="0" tIns="0" rIns="0" bIns="0" anchor="t">
             <a:spAutoFit/>
           </a:bodyPr>
           <a:lstStyle/>
@@ -8508,7 +8585,7 @@
           <a:noFill/>
         </p:spPr>
         <p:txBody>
-          <a:bodyPr wrap="square" anchor="t" lIns="0" rIns="0" tIns="0" bIns="0">
+          <a:bodyPr wrap="square" lIns="0" tIns="0" rIns="0" bIns="0" anchor="t">
             <a:spAutoFit/>
           </a:bodyPr>
           <a:lstStyle/>
@@ -8571,6 +8648,7 @@
           <a:lstStyle/>
           <a:p>
             <a:pPr algn="ctr"/>
+            <a:endParaRPr/>
           </a:p>
         </p:txBody>
       </p:sp>
@@ -8591,7 +8669,7 @@
           <a:noFill/>
         </p:spPr>
         <p:txBody>
-          <a:bodyPr wrap="square" anchor="t" lIns="0" rIns="0" tIns="0" bIns="0">
+          <a:bodyPr wrap="square" lIns="0" tIns="0" rIns="0" bIns="0" anchor="t">
             <a:spAutoFit/>
           </a:bodyPr>
           <a:lstStyle/>
@@ -8630,7 +8708,7 @@
           <a:noFill/>
         </p:spPr>
         <p:txBody>
-          <a:bodyPr wrap="square" anchor="t" lIns="0" rIns="0" tIns="0" bIns="0">
+          <a:bodyPr wrap="square" lIns="0" tIns="0" rIns="0" bIns="0" anchor="t">
             <a:spAutoFit/>
           </a:bodyPr>
           <a:lstStyle/>
@@ -8693,10 +8771,11 @@
           </a:fontRef>
         </p:style>
         <p:txBody>
-          <a:bodyPr rtlCol="0" anchor="ctr" wrap="square"/>
+          <a:bodyPr wrap="square" rtlCol="0" anchor="ctr"/>
           <a:lstStyle/>
           <a:p>
             <a:pPr algn="ctr"/>
+            <a:endParaRPr/>
           </a:p>
         </p:txBody>
       </p:sp>
@@ -8717,7 +8796,7 @@
           <a:noFill/>
         </p:spPr>
         <p:txBody>
-          <a:bodyPr wrap="square" anchor="t" lIns="0" rIns="0" tIns="0" bIns="0">
+          <a:bodyPr wrap="square" lIns="0" tIns="0" rIns="0" bIns="0" anchor="t">
             <a:spAutoFit/>
           </a:bodyPr>
           <a:lstStyle/>
@@ -8756,7 +8835,7 @@
           <a:noFill/>
         </p:spPr>
         <p:txBody>
-          <a:bodyPr wrap="square" anchor="t" lIns="0" rIns="0" tIns="0" bIns="0">
+          <a:bodyPr wrap="square" lIns="0" tIns="0" rIns="0" bIns="0" anchor="t">
             <a:spAutoFit/>
           </a:bodyPr>
           <a:lstStyle/>
@@ -8940,6 +9019,7 @@
           <a:lstStyle/>
           <a:p>
             <a:pPr algn="ctr"/>
+            <a:endParaRPr/>
           </a:p>
         </p:txBody>
       </p:sp>
@@ -8984,10 +9064,11 @@
           </a:fontRef>
         </p:style>
         <p:txBody>
-          <a:bodyPr rtlCol="0" anchor="ctr" wrap="square"/>
+          <a:bodyPr wrap="square" rtlCol="0" anchor="ctr"/>
           <a:lstStyle/>
           <a:p>
             <a:pPr algn="ctr"/>
+            <a:endParaRPr/>
           </a:p>
         </p:txBody>
       </p:sp>
@@ -9008,7 +9089,7 @@
           <a:noFill/>
         </p:spPr>
         <p:txBody>
-          <a:bodyPr wrap="square" anchor="t" lIns="0" rIns="0" tIns="0" bIns="0">
+          <a:bodyPr wrap="square" lIns="0" tIns="0" rIns="0" bIns="0" anchor="t">
             <a:spAutoFit/>
           </a:bodyPr>
           <a:lstStyle/>
@@ -9047,7 +9128,7 @@
           <a:noFill/>
         </p:spPr>
         <p:txBody>
-          <a:bodyPr wrap="square" anchor="t" lIns="0" rIns="0" tIns="0" bIns="0">
+          <a:bodyPr wrap="square" lIns="0" tIns="0" rIns="0" bIns="0" anchor="t">
             <a:spAutoFit/>
           </a:bodyPr>
           <a:lstStyle/>
@@ -9207,7 +9288,7 @@
           <a:noFill/>
         </p:spPr>
         <p:txBody>
-          <a:bodyPr wrap="square" anchor="t" lIns="0" rIns="0" tIns="0" bIns="0">
+          <a:bodyPr wrap="square" lIns="0" tIns="0" rIns="0" bIns="0" anchor="t">
             <a:spAutoFit/>
           </a:bodyPr>
           <a:lstStyle/>
@@ -9238,7 +9319,7 @@
 </file>
 
 <file path=ppt/slides/slide3.xml><?xml version="1.0" encoding="utf-8"?>
-<p:sld xmlns:a="http://schemas.openxmlformats.org/drawingml/2006/main" xmlns:p="http://schemas.openxmlformats.org/presentationml/2006/main" xmlns:r="http://schemas.openxmlformats.org/officeDocument/2006/relationships">
+<p:sld xmlns:a="http://schemas.openxmlformats.org/drawingml/2006/main" xmlns:r="http://schemas.openxmlformats.org/officeDocument/2006/relationships" xmlns:p="http://schemas.openxmlformats.org/presentationml/2006/main">
   <p:cSld>
     <p:spTree>
       <p:nvGrpSpPr>
@@ -9246,7 +9327,14 @@
         <p:cNvGrpSpPr/>
         <p:nvPr/>
       </p:nvGrpSpPr>
-      <p:grpSpPr/>
+      <p:grpSpPr>
+        <a:xfrm>
+          <a:off x="0" y="0"/>
+          <a:ext cx="0" cy="0"/>
+          <a:chOff x="0" y="0"/>
+          <a:chExt cx="0" cy="0"/>
+        </a:xfrm>
+      </p:grpSpPr>
       <p:sp>
         <p:nvSpPr>
           <p:cNvPr id="2" name="Rectangle 1"/>
@@ -9288,6 +9376,7 @@
           <a:lstStyle/>
           <a:p>
             <a:pPr algn="ctr"/>
+            <a:endParaRPr/>
           </a:p>
         </p:txBody>
       </p:sp>
@@ -9308,7 +9397,7 @@
           <a:noFill/>
         </p:spPr>
         <p:txBody>
-          <a:bodyPr wrap="square" anchor="t" lIns="0" rIns="0" tIns="0" bIns="0">
+          <a:bodyPr wrap="square" lIns="0" tIns="0" rIns="0" bIns="0" anchor="t">
             <a:spAutoFit/>
           </a:bodyPr>
           <a:lstStyle/>
@@ -9347,7 +9436,7 @@
           <a:noFill/>
         </p:spPr>
         <p:txBody>
-          <a:bodyPr wrap="square" anchor="t" lIns="0" rIns="0" tIns="0" bIns="0">
+          <a:bodyPr wrap="square" lIns="0" tIns="0" rIns="0" bIns="0" anchor="t">
             <a:spAutoFit/>
           </a:bodyPr>
           <a:lstStyle/>
@@ -9410,6 +9499,7 @@
           <a:lstStyle/>
           <a:p>
             <a:pPr algn="ctr"/>
+            <a:endParaRPr/>
           </a:p>
         </p:txBody>
       </p:sp>
@@ -9430,7 +9520,7 @@
           <a:noFill/>
         </p:spPr>
         <p:txBody>
-          <a:bodyPr wrap="square" anchor="t" lIns="0" rIns="0" tIns="0" bIns="0">
+          <a:bodyPr wrap="square" lIns="0" tIns="0" rIns="0" bIns="0" anchor="t">
             <a:spAutoFit/>
           </a:bodyPr>
           <a:lstStyle/>
@@ -9469,7 +9559,7 @@
           <a:noFill/>
         </p:spPr>
         <p:txBody>
-          <a:bodyPr wrap="square" anchor="t" lIns="0" rIns="0" tIns="0" bIns="0">
+          <a:bodyPr wrap="square" lIns="0" tIns="0" rIns="0" bIns="0" anchor="t">
             <a:spAutoFit/>
           </a:bodyPr>
           <a:lstStyle/>
@@ -9532,10 +9622,11 @@
           </a:fontRef>
         </p:style>
         <p:txBody>
-          <a:bodyPr rtlCol="0" anchor="ctr" wrap="square"/>
+          <a:bodyPr wrap="square" rtlCol="0" anchor="ctr"/>
           <a:lstStyle/>
           <a:p>
             <a:pPr algn="ctr"/>
+            <a:endParaRPr/>
           </a:p>
         </p:txBody>
       </p:sp>
@@ -9556,18 +9647,18 @@
           <a:noFill/>
         </p:spPr>
         <p:txBody>
-          <a:bodyPr wrap="square" anchor="t" lIns="0" rIns="0" tIns="0" bIns="0">
-            <a:spAutoFit/>
-          </a:bodyPr>
-          <a:lstStyle/>
-          <a:p>
-            <a:pPr algn="l">
-              <a:lnSpc>
-                <a:spcPct val="115000"/>
-              </a:lnSpc>
-            </a:pPr>
-            <a:r>
-              <a:rPr sz="3000" b="1">
+          <a:bodyPr wrap="square" lIns="0" tIns="0" rIns="0" bIns="0" anchor="t">
+            <a:spAutoFit/>
+          </a:bodyPr>
+          <a:lstStyle/>
+          <a:p>
+            <a:pPr algn="l">
+              <a:lnSpc>
+                <a:spcPct val="115000"/>
+              </a:lnSpc>
+            </a:pPr>
+            <a:r>
+              <a:rPr sz="3000" b="1" dirty="0">
                 <a:solidFill>
                   <a:srgbClr val="FFD93D"/>
                 </a:solidFill>
@@ -9595,7 +9686,7 @@
           <a:noFill/>
         </p:spPr>
         <p:txBody>
-          <a:bodyPr wrap="square" anchor="t" lIns="0" rIns="0" tIns="0" bIns="0">
+          <a:bodyPr wrap="square" lIns="0" tIns="0" rIns="0" bIns="0" anchor="t">
             <a:spAutoFit/>
           </a:bodyPr>
           <a:lstStyle/>
@@ -9658,10 +9749,11 @@
           </a:fontRef>
         </p:style>
         <p:txBody>
-          <a:bodyPr rtlCol="0" anchor="ctr" wrap="square"/>
+          <a:bodyPr wrap="square" rtlCol="0" anchor="ctr"/>
           <a:lstStyle/>
           <a:p>
             <a:pPr algn="ctr"/>
+            <a:endParaRPr/>
           </a:p>
         </p:txBody>
       </p:sp>
@@ -9682,7 +9774,7 @@
           <a:noFill/>
         </p:spPr>
         <p:txBody>
-          <a:bodyPr wrap="square" anchor="t" lIns="0" rIns="0" tIns="0" bIns="0">
+          <a:bodyPr wrap="square" lIns="0" tIns="0" rIns="0" bIns="0" anchor="t">
             <a:spAutoFit/>
           </a:bodyPr>
           <a:lstStyle/>
@@ -9721,7 +9813,7 @@
           <a:noFill/>
         </p:spPr>
         <p:txBody>
-          <a:bodyPr wrap="square" anchor="t" lIns="0" rIns="0" tIns="0" bIns="0">
+          <a:bodyPr wrap="square" lIns="0" tIns="0" rIns="0" bIns="0" anchor="t">
             <a:spAutoFit/>
           </a:bodyPr>
           <a:lstStyle/>
@@ -9784,10 +9876,11 @@
           </a:fontRef>
         </p:style>
         <p:txBody>
-          <a:bodyPr rtlCol="0" anchor="ctr" wrap="square"/>
+          <a:bodyPr wrap="square" rtlCol="0" anchor="ctr"/>
           <a:lstStyle/>
           <a:p>
             <a:pPr algn="ctr"/>
+            <a:endParaRPr/>
           </a:p>
         </p:txBody>
       </p:sp>
@@ -9808,7 +9901,7 @@
           <a:noFill/>
         </p:spPr>
         <p:txBody>
-          <a:bodyPr wrap="square" anchor="t" lIns="0" rIns="0" tIns="0" bIns="0">
+          <a:bodyPr wrap="square" lIns="0" tIns="0" rIns="0" bIns="0" anchor="t">
             <a:spAutoFit/>
           </a:bodyPr>
           <a:lstStyle/>
@@ -9847,7 +9940,7 @@
           <a:noFill/>
         </p:spPr>
         <p:txBody>
-          <a:bodyPr wrap="square" anchor="t" lIns="0" rIns="0" tIns="0" bIns="0">
+          <a:bodyPr wrap="square" lIns="0" tIns="0" rIns="0" bIns="0" anchor="t">
             <a:spAutoFit/>
           </a:bodyPr>
           <a:lstStyle/>
@@ -9910,10 +10003,11 @@
           </a:fontRef>
         </p:style>
         <p:txBody>
-          <a:bodyPr rtlCol="0" anchor="ctr" wrap="square"/>
+          <a:bodyPr wrap="square" rtlCol="0" anchor="ctr"/>
           <a:lstStyle/>
           <a:p>
             <a:pPr algn="ctr"/>
+            <a:endParaRPr/>
           </a:p>
         </p:txBody>
       </p:sp>
@@ -9934,7 +10028,7 @@
           <a:noFill/>
         </p:spPr>
         <p:txBody>
-          <a:bodyPr wrap="square" anchor="t" lIns="0" rIns="0" tIns="0" bIns="0">
+          <a:bodyPr wrap="square" lIns="0" tIns="0" rIns="0" bIns="0" anchor="t">
             <a:spAutoFit/>
           </a:bodyPr>
           <a:lstStyle/>
@@ -9973,7 +10067,7 @@
           <a:noFill/>
         </p:spPr>
         <p:txBody>
-          <a:bodyPr wrap="square" anchor="t" lIns="0" rIns="0" tIns="0" bIns="0">
+          <a:bodyPr wrap="square" lIns="0" tIns="0" rIns="0" bIns="0" anchor="t">
             <a:spAutoFit/>
           </a:bodyPr>
           <a:lstStyle/>
@@ -10036,10 +10130,11 @@
           </a:fontRef>
         </p:style>
         <p:txBody>
-          <a:bodyPr rtlCol="0" anchor="ctr" wrap="square"/>
+          <a:bodyPr wrap="square" rtlCol="0" anchor="ctr"/>
           <a:lstStyle/>
           <a:p>
             <a:pPr algn="ctr"/>
+            <a:endParaRPr/>
           </a:p>
         </p:txBody>
       </p:sp>
@@ -10060,7 +10155,7 @@
           <a:noFill/>
         </p:spPr>
         <p:txBody>
-          <a:bodyPr wrap="square" anchor="t" lIns="0" rIns="0" tIns="0" bIns="0">
+          <a:bodyPr wrap="square" lIns="0" tIns="0" rIns="0" bIns="0" anchor="t">
             <a:spAutoFit/>
           </a:bodyPr>
           <a:lstStyle/>
@@ -10099,7 +10194,7 @@
           <a:noFill/>
         </p:spPr>
         <p:txBody>
-          <a:bodyPr wrap="square" anchor="t" lIns="0" rIns="0" tIns="0" bIns="0">
+          <a:bodyPr wrap="square" lIns="0" tIns="0" rIns="0" bIns="0" anchor="t">
             <a:spAutoFit/>
           </a:bodyPr>
           <a:lstStyle/>
@@ -10138,7 +10233,7 @@
           <a:noFill/>
         </p:spPr>
         <p:txBody>
-          <a:bodyPr wrap="square" anchor="t" lIns="0" rIns="0" tIns="0" bIns="0">
+          <a:bodyPr wrap="square" lIns="0" tIns="0" rIns="0" bIns="0" anchor="t">
             <a:spAutoFit/>
           </a:bodyPr>
           <a:lstStyle/>
@@ -10220,10 +10315,11 @@
           </a:fontRef>
         </p:style>
         <p:txBody>
-          <a:bodyPr rtlCol="0" anchor="ctr" wrap="square"/>
+          <a:bodyPr wrap="square" rtlCol="0" anchor="ctr"/>
           <a:lstStyle/>
           <a:p>
             <a:pPr algn="ctr"/>
+            <a:endParaRPr/>
           </a:p>
         </p:txBody>
       </p:sp>
@@ -10244,7 +10340,7 @@
           <a:noFill/>
         </p:spPr>
         <p:txBody>
-          <a:bodyPr wrap="square" anchor="t" lIns="0" rIns="0" tIns="0" bIns="0">
+          <a:bodyPr wrap="square" lIns="0" tIns="0" rIns="0" bIns="0" anchor="t">
             <a:spAutoFit/>
           </a:bodyPr>
           <a:lstStyle/>
@@ -10283,7 +10379,7 @@
           <a:noFill/>
         </p:spPr>
         <p:txBody>
-          <a:bodyPr wrap="square" anchor="t" lIns="0" rIns="0" tIns="0" bIns="0">
+          <a:bodyPr wrap="square" lIns="0" tIns="0" rIns="0" bIns="0" anchor="t">
             <a:spAutoFit/>
           </a:bodyPr>
           <a:lstStyle/>
@@ -10333,32 +10429,50 @@
         <p:spPr>
           <a:xfrm>
             <a:off x="822960" y="6492240"/>
-            <a:ext cx="10561320" cy="228600"/>
-          </a:xfrm>
-          <a:prstGeom prst="rect">
-            <a:avLst/>
-          </a:prstGeom>
-          <a:noFill/>
-        </p:spPr>
-        <p:txBody>
-          <a:bodyPr wrap="square" anchor="t" lIns="0" rIns="0" tIns="0" bIns="0">
-            <a:spAutoFit/>
-          </a:bodyPr>
-          <a:lstStyle/>
-          <a:p>
-            <a:pPr algn="l">
-              <a:lnSpc>
-                <a:spcPct val="115000"/>
-              </a:lnSpc>
-            </a:pPr>
-            <a:r>
-              <a:rPr sz="900" b="0">
+            <a:ext cx="10561320" cy="145617"/>
+          </a:xfrm>
+          <a:prstGeom prst="rect">
+            <a:avLst/>
+          </a:prstGeom>
+          <a:noFill/>
+        </p:spPr>
+        <p:txBody>
+          <a:bodyPr wrap="square" lIns="0" tIns="0" rIns="0" bIns="0" anchor="t">
+            <a:spAutoFit/>
+          </a:bodyPr>
+          <a:lstStyle/>
+          <a:p>
+            <a:pPr algn="l">
+              <a:lnSpc>
+                <a:spcPct val="115000"/>
+              </a:lnSpc>
+            </a:pPr>
+            <a:r>
+              <a:rPr sz="900" b="0" i="1" dirty="0">
                 <a:solidFill>
                   <a:srgbClr val="666666"/>
                 </a:solidFill>
                 <a:latin typeface="Segoe UI"/>
               </a:rPr>
-              <a:t>Sources: TRAI via The Week (2026) · GSMA SOMIC 2025 · Cisco Privacy Survey 2024 · Counterpoint (H1 2025) · BCC Research (2025) · MarketsandMarkets — full list on the last slide</a:t>
+              <a:t>Sources: TRAI via The Week (2026) · GSMA SOMIC 2025 · Cisco Privacy Survey 2024 · Counterpoint (H1 2025) · BCC Research (2025) · </a:t>
+            </a:r>
+            <a:r>
+              <a:rPr sz="900" b="0" i="1" dirty="0" err="1">
+                <a:solidFill>
+                  <a:srgbClr val="666666"/>
+                </a:solidFill>
+                <a:latin typeface="Segoe UI"/>
+              </a:rPr>
+              <a:t>MarketsandMarkets</a:t>
+            </a:r>
+            <a:r>
+              <a:rPr sz="900" b="0" i="1" dirty="0">
+                <a:solidFill>
+                  <a:srgbClr val="666666"/>
+                </a:solidFill>
+                <a:latin typeface="Segoe UI"/>
+              </a:rPr>
+              <a:t> — full list on the last slide</a:t>
             </a:r>
           </a:p>
         </p:txBody>
@@ -10372,7 +10486,7 @@
 </file>
 
 <file path=ppt/slides/slide4.xml><?xml version="1.0" encoding="utf-8"?>
-<p:sld xmlns:a="http://schemas.openxmlformats.org/drawingml/2006/main" xmlns:p="http://schemas.openxmlformats.org/presentationml/2006/main" xmlns:r="http://schemas.openxmlformats.org/officeDocument/2006/relationships">
+<p:sld xmlns:a="http://schemas.openxmlformats.org/drawingml/2006/main" xmlns:r="http://schemas.openxmlformats.org/officeDocument/2006/relationships" xmlns:p="http://schemas.openxmlformats.org/presentationml/2006/main">
   <p:cSld>
     <p:spTree>
       <p:nvGrpSpPr>
@@ -10380,7 +10494,14 @@
         <p:cNvGrpSpPr/>
         <p:nvPr/>
       </p:nvGrpSpPr>
-      <p:grpSpPr/>
+      <p:grpSpPr>
+        <a:xfrm>
+          <a:off x="0" y="0"/>
+          <a:ext cx="0" cy="0"/>
+          <a:chOff x="0" y="0"/>
+          <a:chExt cx="0" cy="0"/>
+        </a:xfrm>
+      </p:grpSpPr>
       <p:sp>
         <p:nvSpPr>
           <p:cNvPr id="2" name="Rectangle 1"/>
@@ -10422,6 +10543,7 @@
           <a:lstStyle/>
           <a:p>
             <a:pPr algn="ctr"/>
+            <a:endParaRPr/>
           </a:p>
         </p:txBody>
       </p:sp>
@@ -10442,7 +10564,7 @@
           <a:noFill/>
         </p:spPr>
         <p:txBody>
-          <a:bodyPr wrap="square" anchor="t" lIns="0" rIns="0" tIns="0" bIns="0">
+          <a:bodyPr wrap="square" lIns="0" tIns="0" rIns="0" bIns="0" anchor="t">
             <a:spAutoFit/>
           </a:bodyPr>
           <a:lstStyle/>
@@ -10481,7 +10603,7 @@
           <a:noFill/>
         </p:spPr>
         <p:txBody>
-          <a:bodyPr wrap="square" anchor="t" lIns="0" rIns="0" tIns="0" bIns="0">
+          <a:bodyPr wrap="square" lIns="0" tIns="0" rIns="0" bIns="0" anchor="t">
             <a:spAutoFit/>
           </a:bodyPr>
           <a:lstStyle/>
@@ -10544,6 +10666,7 @@
           <a:lstStyle/>
           <a:p>
             <a:pPr algn="ctr"/>
+            <a:endParaRPr/>
           </a:p>
         </p:txBody>
       </p:sp>
@@ -10564,7 +10687,7 @@
           <a:noFill/>
         </p:spPr>
         <p:txBody>
-          <a:bodyPr wrap="square" anchor="t" lIns="0" rIns="0" tIns="0" bIns="0">
+          <a:bodyPr wrap="square" lIns="0" tIns="0" rIns="0" bIns="0" anchor="t">
             <a:spAutoFit/>
           </a:bodyPr>
           <a:lstStyle/>
@@ -10603,7 +10726,7 @@
           <a:noFill/>
         </p:spPr>
         <p:txBody>
-          <a:bodyPr wrap="square" anchor="t" lIns="0" rIns="0" tIns="0" bIns="0">
+          <a:bodyPr wrap="square" lIns="0" tIns="0" rIns="0" bIns="0" anchor="t">
             <a:spAutoFit/>
           </a:bodyPr>
           <a:lstStyle/>
@@ -10666,10 +10789,11 @@
           </a:fontRef>
         </p:style>
         <p:txBody>
-          <a:bodyPr rtlCol="0" anchor="ctr" wrap="square"/>
+          <a:bodyPr wrap="square" rtlCol="0" anchor="ctr"/>
           <a:lstStyle/>
           <a:p>
             <a:pPr algn="ctr"/>
+            <a:endParaRPr/>
           </a:p>
         </p:txBody>
       </p:sp>
@@ -10690,7 +10814,7 @@
           <a:noFill/>
         </p:spPr>
         <p:txBody>
-          <a:bodyPr wrap="square" anchor="t" lIns="0" rIns="0" tIns="0" bIns="0">
+          <a:bodyPr wrap="square" lIns="0" tIns="0" rIns="0" bIns="0" anchor="t">
             <a:spAutoFit/>
           </a:bodyPr>
           <a:lstStyle/>
@@ -10729,7 +10853,7 @@
           <a:noFill/>
         </p:spPr>
         <p:txBody>
-          <a:bodyPr wrap="square" anchor="t" lIns="0" rIns="0" tIns="0" bIns="0">
+          <a:bodyPr wrap="square" lIns="0" tIns="0" rIns="0" bIns="0" anchor="t">
             <a:spAutoFit/>
           </a:bodyPr>
           <a:lstStyle/>
@@ -10792,10 +10916,11 @@
           </a:fontRef>
         </p:style>
         <p:txBody>
-          <a:bodyPr rtlCol="0" anchor="ctr" wrap="square"/>
+          <a:bodyPr wrap="square" rtlCol="0" anchor="ctr"/>
           <a:lstStyle/>
           <a:p>
             <a:pPr algn="ctr"/>
+            <a:endParaRPr/>
           </a:p>
         </p:txBody>
       </p:sp>
@@ -10816,7 +10941,7 @@
           <a:noFill/>
         </p:spPr>
         <p:txBody>
-          <a:bodyPr wrap="square" anchor="t" lIns="0" rIns="0" tIns="0" bIns="0">
+          <a:bodyPr wrap="square" lIns="0" tIns="0" rIns="0" bIns="0" anchor="t">
             <a:spAutoFit/>
           </a:bodyPr>
           <a:lstStyle/>
@@ -10855,7 +10980,7 @@
           <a:noFill/>
         </p:spPr>
         <p:txBody>
-          <a:bodyPr wrap="square" anchor="t" lIns="0" rIns="0" tIns="0" bIns="0">
+          <a:bodyPr wrap="square" lIns="0" tIns="0" rIns="0" bIns="0" anchor="t">
             <a:spAutoFit/>
           </a:bodyPr>
           <a:lstStyle/>
@@ -10918,10 +11043,11 @@
           </a:fontRef>
         </p:style>
         <p:txBody>
-          <a:bodyPr rtlCol="0" anchor="ctr" wrap="square"/>
+          <a:bodyPr wrap="square" rtlCol="0" anchor="ctr"/>
           <a:lstStyle/>
           <a:p>
             <a:pPr algn="ctr"/>
+            <a:endParaRPr/>
           </a:p>
         </p:txBody>
       </p:sp>
@@ -10942,7 +11068,7 @@
           <a:noFill/>
         </p:spPr>
         <p:txBody>
-          <a:bodyPr wrap="square" anchor="t" lIns="0" rIns="0" tIns="0" bIns="0">
+          <a:bodyPr wrap="square" lIns="0" tIns="0" rIns="0" bIns="0" anchor="t">
             <a:spAutoFit/>
           </a:bodyPr>
           <a:lstStyle/>
@@ -10981,7 +11107,7 @@
           <a:noFill/>
         </p:spPr>
         <p:txBody>
-          <a:bodyPr wrap="square" anchor="t" lIns="0" rIns="0" tIns="0" bIns="0">
+          <a:bodyPr wrap="square" lIns="0" tIns="0" rIns="0" bIns="0" anchor="t">
             <a:spAutoFit/>
           </a:bodyPr>
           <a:lstStyle/>
@@ -11044,10 +11170,11 @@
           </a:fontRef>
         </p:style>
         <p:txBody>
-          <a:bodyPr rtlCol="0" anchor="ctr" wrap="square"/>
+          <a:bodyPr wrap="square" rtlCol="0" anchor="ctr"/>
           <a:lstStyle/>
           <a:p>
             <a:pPr algn="ctr"/>
+            <a:endParaRPr/>
           </a:p>
         </p:txBody>
       </p:sp>
@@ -11068,7 +11195,7 @@
           <a:noFill/>
         </p:spPr>
         <p:txBody>
-          <a:bodyPr wrap="square" anchor="t" lIns="0" rIns="0" tIns="0" bIns="0">
+          <a:bodyPr wrap="square" lIns="0" tIns="0" rIns="0" bIns="0" anchor="t">
             <a:spAutoFit/>
           </a:bodyPr>
           <a:lstStyle/>
@@ -11107,7 +11234,7 @@
           <a:noFill/>
         </p:spPr>
         <p:txBody>
-          <a:bodyPr wrap="square" anchor="t" lIns="0" rIns="0" tIns="0" bIns="0">
+          <a:bodyPr wrap="square" lIns="0" tIns="0" rIns="0" bIns="0" anchor="t">
             <a:spAutoFit/>
           </a:bodyPr>
           <a:lstStyle/>
@@ -11170,10 +11297,11 @@
           </a:fontRef>
         </p:style>
         <p:txBody>
-          <a:bodyPr rtlCol="0" anchor="ctr" wrap="square"/>
+          <a:bodyPr wrap="square" rtlCol="0" anchor="ctr"/>
           <a:lstStyle/>
           <a:p>
             <a:pPr algn="ctr"/>
+            <a:endParaRPr/>
           </a:p>
         </p:txBody>
       </p:sp>
@@ -11194,7 +11322,7 @@
           <a:noFill/>
         </p:spPr>
         <p:txBody>
-          <a:bodyPr wrap="square" anchor="t" lIns="0" rIns="0" tIns="0" bIns="0">
+          <a:bodyPr wrap="square" lIns="0" tIns="0" rIns="0" bIns="0" anchor="t">
             <a:spAutoFit/>
           </a:bodyPr>
           <a:lstStyle/>
@@ -11233,7 +11361,7 @@
           <a:noFill/>
         </p:spPr>
         <p:txBody>
-          <a:bodyPr wrap="square" anchor="t" lIns="0" rIns="0" tIns="0" bIns="0">
+          <a:bodyPr wrap="square" lIns="0" tIns="0" rIns="0" bIns="0" anchor="t">
             <a:spAutoFit/>
           </a:bodyPr>
           <a:lstStyle/>
@@ -11296,10 +11424,11 @@
           </a:fontRef>
         </p:style>
         <p:txBody>
-          <a:bodyPr rtlCol="0" anchor="ctr" wrap="square"/>
+          <a:bodyPr wrap="square" rtlCol="0" anchor="ctr"/>
           <a:lstStyle/>
           <a:p>
             <a:pPr algn="ctr"/>
+            <a:endParaRPr/>
           </a:p>
         </p:txBody>
       </p:sp>
@@ -11320,7 +11449,7 @@
           <a:noFill/>
         </p:spPr>
         <p:txBody>
-          <a:bodyPr wrap="square" anchor="t" lIns="0" rIns="0" tIns="0" bIns="0">
+          <a:bodyPr wrap="square" lIns="0" tIns="0" rIns="0" bIns="0" anchor="t">
             <a:spAutoFit/>
           </a:bodyPr>
           <a:lstStyle/>
@@ -11359,7 +11488,7 @@
           <a:noFill/>
         </p:spPr>
         <p:txBody>
-          <a:bodyPr wrap="square" anchor="t" lIns="0" rIns="0" tIns="0" bIns="0">
+          <a:bodyPr wrap="square" lIns="0" tIns="0" rIns="0" bIns="0" anchor="t">
             <a:spAutoFit/>
           </a:bodyPr>
           <a:lstStyle/>
@@ -11390,7 +11519,7 @@
 </file>
 
 <file path=ppt/slides/slide5.xml><?xml version="1.0" encoding="utf-8"?>
-<p:sld xmlns:a="http://schemas.openxmlformats.org/drawingml/2006/main" xmlns:p="http://schemas.openxmlformats.org/presentationml/2006/main" xmlns:r="http://schemas.openxmlformats.org/officeDocument/2006/relationships">
+<p:sld xmlns:a="http://schemas.openxmlformats.org/drawingml/2006/main" xmlns:r="http://schemas.openxmlformats.org/officeDocument/2006/relationships" xmlns:p="http://schemas.openxmlformats.org/presentationml/2006/main">
   <p:cSld>
     <p:spTree>
       <p:nvGrpSpPr>
@@ -11398,7 +11527,14 @@
         <p:cNvGrpSpPr/>
         <p:nvPr/>
       </p:nvGrpSpPr>
-      <p:grpSpPr/>
+      <p:grpSpPr>
+        <a:xfrm>
+          <a:off x="0" y="0"/>
+          <a:ext cx="0" cy="0"/>
+          <a:chOff x="0" y="0"/>
+          <a:chExt cx="0" cy="0"/>
+        </a:xfrm>
+      </p:grpSpPr>
       <p:sp>
         <p:nvSpPr>
           <p:cNvPr id="2" name="Rectangle 1"/>
@@ -11407,7 +11543,7 @@
         </p:nvSpPr>
         <p:spPr>
           <a:xfrm>
-            <a:off x="0" y="0"/>
+            <a:off x="8238" y="8238"/>
             <a:ext cx="12191695" cy="6858000"/>
           </a:xfrm>
           <a:prstGeom prst="rect">
@@ -11440,6 +11576,7 @@
           <a:lstStyle/>
           <a:p>
             <a:pPr algn="ctr"/>
+            <a:endParaRPr/>
           </a:p>
         </p:txBody>
       </p:sp>
@@ -11460,7 +11597,7 @@
           <a:noFill/>
         </p:spPr>
         <p:txBody>
-          <a:bodyPr wrap="square" anchor="t" lIns="0" rIns="0" tIns="0" bIns="0">
+          <a:bodyPr wrap="square" lIns="0" tIns="0" rIns="0" bIns="0" anchor="t">
             <a:spAutoFit/>
           </a:bodyPr>
           <a:lstStyle/>
@@ -11499,7 +11636,7 @@
           <a:noFill/>
         </p:spPr>
         <p:txBody>
-          <a:bodyPr wrap="square" anchor="t" lIns="0" rIns="0" tIns="0" bIns="0">
+          <a:bodyPr wrap="square" lIns="0" tIns="0" rIns="0" bIns="0" anchor="t">
             <a:spAutoFit/>
           </a:bodyPr>
           <a:lstStyle/>
@@ -11562,6 +11699,7 @@
           <a:lstStyle/>
           <a:p>
             <a:pPr algn="ctr"/>
+            <a:endParaRPr/>
           </a:p>
         </p:txBody>
       </p:sp>
@@ -11582,7 +11720,7 @@
           <a:noFill/>
         </p:spPr>
         <p:txBody>
-          <a:bodyPr wrap="square" anchor="t" lIns="0" rIns="0" tIns="0" bIns="0">
+          <a:bodyPr wrap="square" lIns="0" tIns="0" rIns="0" bIns="0" anchor="t">
             <a:spAutoFit/>
           </a:bodyPr>
           <a:lstStyle/>
@@ -11621,7 +11759,7 @@
           <a:noFill/>
         </p:spPr>
         <p:txBody>
-          <a:bodyPr wrap="square" anchor="t" lIns="0" rIns="0" tIns="0" bIns="0">
+          <a:bodyPr wrap="square" lIns="0" tIns="0" rIns="0" bIns="0" anchor="t">
             <a:spAutoFit/>
           </a:bodyPr>
           <a:lstStyle/>
@@ -11684,10 +11822,11 @@
           </a:fontRef>
         </p:style>
         <p:txBody>
-          <a:bodyPr rtlCol="0" anchor="ctr" wrap="square"/>
+          <a:bodyPr wrap="square" rtlCol="0" anchor="ctr"/>
           <a:lstStyle/>
           <a:p>
             <a:pPr algn="ctr"/>
+            <a:endParaRPr/>
           </a:p>
         </p:txBody>
       </p:sp>
@@ -11708,7 +11847,7 @@
           <a:noFill/>
         </p:spPr>
         <p:txBody>
-          <a:bodyPr wrap="square" anchor="t" lIns="0" rIns="0" tIns="0" bIns="0">
+          <a:bodyPr wrap="square" lIns="0" tIns="0" rIns="0" bIns="0" anchor="t">
             <a:spAutoFit/>
           </a:bodyPr>
           <a:lstStyle/>
@@ -11747,7 +11886,7 @@
           <a:noFill/>
         </p:spPr>
         <p:txBody>
-          <a:bodyPr wrap="square" anchor="t" lIns="0" rIns="0" tIns="0" bIns="0">
+          <a:bodyPr wrap="square" lIns="0" tIns="0" rIns="0" bIns="0" anchor="t">
             <a:spAutoFit/>
           </a:bodyPr>
           <a:lstStyle/>
@@ -11826,6 +11965,7 @@
           <a:lstStyle/>
           <a:p>
             <a:pPr algn="ctr"/>
+            <a:endParaRPr/>
           </a:p>
         </p:txBody>
       </p:sp>
@@ -11870,10 +12010,11 @@
           </a:fontRef>
         </p:style>
         <p:txBody>
-          <a:bodyPr rtlCol="0" anchor="ctr" wrap="square"/>
+          <a:bodyPr wrap="square" rtlCol="0" anchor="ctr"/>
           <a:lstStyle/>
           <a:p>
             <a:pPr algn="ctr"/>
+            <a:endParaRPr/>
           </a:p>
         </p:txBody>
       </p:sp>
@@ -11894,7 +12035,7 @@
           <a:noFill/>
         </p:spPr>
         <p:txBody>
-          <a:bodyPr wrap="square" anchor="t" lIns="0" rIns="0" tIns="0" bIns="0">
+          <a:bodyPr wrap="square" lIns="0" tIns="0" rIns="0" bIns="0" anchor="t">
             <a:spAutoFit/>
           </a:bodyPr>
           <a:lstStyle/>
@@ -11933,7 +12074,7 @@
           <a:noFill/>
         </p:spPr>
         <p:txBody>
-          <a:bodyPr wrap="square" anchor="t" lIns="0" rIns="0" tIns="0" bIns="0">
+          <a:bodyPr wrap="square" lIns="0" tIns="0" rIns="0" bIns="0" anchor="t">
             <a:spAutoFit/>
           </a:bodyPr>
           <a:lstStyle/>
@@ -12012,10 +12153,11 @@
           </a:fontRef>
         </p:style>
         <p:txBody>
-          <a:bodyPr rtlCol="0" anchor="ctr" wrap="square"/>
+          <a:bodyPr wrap="square" rtlCol="0" anchor="ctr"/>
           <a:lstStyle/>
           <a:p>
             <a:pPr algn="ctr"/>
+            <a:endParaRPr/>
           </a:p>
         </p:txBody>
       </p:sp>
@@ -12036,7 +12178,7 @@
           <a:noFill/>
         </p:spPr>
         <p:txBody>
-          <a:bodyPr wrap="square" anchor="t" lIns="0" rIns="0" tIns="0" bIns="0">
+          <a:bodyPr wrap="square" lIns="0" tIns="0" rIns="0" bIns="0" anchor="t">
             <a:spAutoFit/>
           </a:bodyPr>
           <a:lstStyle/>
@@ -12075,7 +12217,7 @@
           <a:noFill/>
         </p:spPr>
         <p:txBody>
-          <a:bodyPr wrap="square" anchor="t" lIns="0" rIns="0" tIns="0" bIns="0">
+          <a:bodyPr wrap="square" lIns="0" tIns="0" rIns="0" bIns="0" anchor="t">
             <a:spAutoFit/>
           </a:bodyPr>
           <a:lstStyle/>
@@ -12138,10 +12280,11 @@
           </a:fontRef>
         </p:style>
         <p:txBody>
-          <a:bodyPr rtlCol="0" anchor="ctr" wrap="square"/>
+          <a:bodyPr wrap="square" rtlCol="0" anchor="ctr"/>
           <a:lstStyle/>
           <a:p>
             <a:pPr algn="ctr"/>
+            <a:endParaRPr/>
           </a:p>
         </p:txBody>
       </p:sp>
@@ -12162,7 +12305,7 @@
           <a:noFill/>
         </p:spPr>
         <p:txBody>
-          <a:bodyPr wrap="square" anchor="t" lIns="0" rIns="0" tIns="0" bIns="0">
+          <a:bodyPr wrap="square" lIns="0" tIns="0" rIns="0" bIns="0" anchor="t">
             <a:spAutoFit/>
           </a:bodyPr>
           <a:lstStyle/>
@@ -12201,7 +12344,7 @@
           <a:noFill/>
         </p:spPr>
         <p:txBody>
-          <a:bodyPr wrap="square" anchor="t" lIns="0" rIns="0" tIns="0" bIns="0">
+          <a:bodyPr wrap="square" lIns="0" tIns="0" rIns="0" bIns="0" anchor="t">
             <a:spAutoFit/>
           </a:bodyPr>
           <a:lstStyle/>
@@ -12264,10 +12407,11 @@
           </a:fontRef>
         </p:style>
         <p:txBody>
-          <a:bodyPr rtlCol="0" anchor="ctr" wrap="square"/>
+          <a:bodyPr wrap="square" rtlCol="0" anchor="ctr"/>
           <a:lstStyle/>
           <a:p>
             <a:pPr algn="ctr"/>
+            <a:endParaRPr/>
           </a:p>
         </p:txBody>
       </p:sp>
@@ -12288,7 +12432,7 @@
           <a:noFill/>
         </p:spPr>
         <p:txBody>
-          <a:bodyPr wrap="square" anchor="t" lIns="0" rIns="0" tIns="0" bIns="0">
+          <a:bodyPr wrap="square" lIns="0" tIns="0" rIns="0" bIns="0" anchor="t">
             <a:spAutoFit/>
           </a:bodyPr>
           <a:lstStyle/>
@@ -12327,7 +12471,7 @@
           <a:noFill/>
         </p:spPr>
         <p:txBody>
-          <a:bodyPr wrap="square" anchor="t" lIns="0" rIns="0" tIns="0" bIns="0">
+          <a:bodyPr wrap="square" lIns="0" tIns="0" rIns="0" bIns="0" anchor="t">
             <a:spAutoFit/>
           </a:bodyPr>
           <a:lstStyle/>
@@ -12406,6 +12550,7 @@
           <a:lstStyle/>
           <a:p>
             <a:pPr algn="ctr"/>
+            <a:endParaRPr/>
           </a:p>
         </p:txBody>
       </p:sp>
@@ -12450,6 +12595,7 @@
           <a:lstStyle/>
           <a:p>
             <a:pPr algn="ctr"/>
+            <a:endParaRPr/>
           </a:p>
         </p:txBody>
       </p:sp>
@@ -12494,6 +12640,7 @@
           <a:lstStyle/>
           <a:p>
             <a:pPr algn="ctr"/>
+            <a:endParaRPr/>
           </a:p>
         </p:txBody>
       </p:sp>
@@ -12538,10 +12685,11 @@
           </a:fontRef>
         </p:style>
         <p:txBody>
-          <a:bodyPr rtlCol="0" anchor="ctr" wrap="square"/>
+          <a:bodyPr wrap="square" rtlCol="0" anchor="ctr"/>
           <a:lstStyle/>
           <a:p>
             <a:pPr algn="ctr"/>
+            <a:endParaRPr/>
           </a:p>
         </p:txBody>
       </p:sp>
@@ -12562,7 +12710,7 @@
           <a:noFill/>
         </p:spPr>
         <p:txBody>
-          <a:bodyPr wrap="square" anchor="t" lIns="0" rIns="0" tIns="0" bIns="0">
+          <a:bodyPr wrap="square" lIns="0" tIns="0" rIns="0" bIns="0" anchor="t">
             <a:spAutoFit/>
           </a:bodyPr>
           <a:lstStyle/>
@@ -12601,7 +12749,7 @@
           <a:noFill/>
         </p:spPr>
         <p:txBody>
-          <a:bodyPr wrap="square" anchor="t" lIns="0" rIns="0" tIns="0" bIns="0">
+          <a:bodyPr wrap="square" lIns="0" tIns="0" rIns="0" bIns="0" anchor="t">
             <a:spAutoFit/>
           </a:bodyPr>
           <a:lstStyle/>
@@ -12643,15 +12791,12 @@
                 <a:spcPct val="110000"/>
               </a:lnSpc>
             </a:pPr>
-            <a:r>
-              <a:rPr sz="1100" b="0">
-                <a:solidFill>
-                  <a:srgbClr val="9A9A9A"/>
-                </a:solidFill>
-                <a:latin typeface="Segoe UI"/>
-              </a:rPr>
-              <a:t/>
-            </a:r>
+            <a:endParaRPr sz="1100" b="0">
+              <a:solidFill>
+                <a:srgbClr val="9A9A9A"/>
+              </a:solidFill>
+              <a:latin typeface="Segoe UI"/>
+            </a:endParaRPr>
           </a:p>
           <a:p>
             <a:pPr algn="ctr">
@@ -12728,6 +12873,7 @@
           <a:lstStyle/>
           <a:p>
             <a:pPr algn="ctr"/>
+            <a:endParaRPr/>
           </a:p>
         </p:txBody>
       </p:sp>
@@ -12772,10 +12918,11 @@
           </a:fontRef>
         </p:style>
         <p:txBody>
-          <a:bodyPr rtlCol="0" anchor="ctr" wrap="square"/>
+          <a:bodyPr wrap="square" rtlCol="0" anchor="ctr"/>
           <a:lstStyle/>
           <a:p>
             <a:pPr algn="ctr"/>
+            <a:endParaRPr/>
           </a:p>
         </p:txBody>
       </p:sp>
@@ -12796,7 +12943,7 @@
           <a:noFill/>
         </p:spPr>
         <p:txBody>
-          <a:bodyPr wrap="square" anchor="t" lIns="0" rIns="0" tIns="0" bIns="0">
+          <a:bodyPr wrap="square" lIns="0" tIns="0" rIns="0" bIns="0" anchor="t">
             <a:spAutoFit/>
           </a:bodyPr>
           <a:lstStyle/>
@@ -12835,7 +12982,7 @@
           <a:noFill/>
         </p:spPr>
         <p:txBody>
-          <a:bodyPr wrap="square" anchor="t" lIns="0" rIns="0" tIns="0" bIns="0">
+          <a:bodyPr wrap="square" lIns="0" tIns="0" rIns="0" bIns="0" anchor="t">
             <a:spAutoFit/>
           </a:bodyPr>
           <a:lstStyle/>
@@ -12898,10 +13045,11 @@
           </a:fontRef>
         </p:style>
         <p:txBody>
-          <a:bodyPr rtlCol="0" anchor="ctr" wrap="square"/>
+          <a:bodyPr wrap="square" rtlCol="0" anchor="ctr"/>
           <a:lstStyle/>
           <a:p>
             <a:pPr algn="ctr"/>
+            <a:endParaRPr/>
           </a:p>
         </p:txBody>
       </p:sp>
@@ -12922,7 +13070,7 @@
           <a:noFill/>
         </p:spPr>
         <p:txBody>
-          <a:bodyPr wrap="square" anchor="t" lIns="0" rIns="0" tIns="0" bIns="0">
+          <a:bodyPr wrap="square" lIns="0" tIns="0" rIns="0" bIns="0" anchor="t">
             <a:spAutoFit/>
           </a:bodyPr>
           <a:lstStyle/>
@@ -12961,7 +13109,7 @@
           <a:noFill/>
         </p:spPr>
         <p:txBody>
-          <a:bodyPr wrap="square" anchor="t" lIns="0" rIns="0" tIns="0" bIns="0">
+          <a:bodyPr wrap="square" lIns="0" tIns="0" rIns="0" bIns="0" anchor="t">
             <a:spAutoFit/>
           </a:bodyPr>
           <a:lstStyle/>
@@ -13024,6 +13172,7 @@
           <a:lstStyle/>
           <a:p>
             <a:pPr algn="ctr"/>
+            <a:endParaRPr/>
           </a:p>
         </p:txBody>
       </p:sp>
@@ -13068,6 +13217,7 @@
           <a:lstStyle/>
           <a:p>
             <a:pPr algn="ctr"/>
+            <a:endParaRPr/>
           </a:p>
         </p:txBody>
       </p:sp>
@@ -13112,10 +13262,11 @@
           </a:fontRef>
         </p:style>
         <p:txBody>
-          <a:bodyPr rtlCol="0" anchor="ctr" wrap="square"/>
+          <a:bodyPr wrap="square" rtlCol="0" anchor="ctr"/>
           <a:lstStyle/>
           <a:p>
             <a:pPr algn="ctr"/>
+            <a:endParaRPr/>
           </a:p>
         </p:txBody>
       </p:sp>
@@ -13136,7 +13287,7 @@
           <a:noFill/>
         </p:spPr>
         <p:txBody>
-          <a:bodyPr wrap="square" anchor="t" lIns="0" rIns="0" tIns="0" bIns="0">
+          <a:bodyPr wrap="square" lIns="0" tIns="0" rIns="0" bIns="0" anchor="t">
             <a:spAutoFit/>
           </a:bodyPr>
           <a:lstStyle/>
@@ -13215,6 +13366,7 @@
           <a:lstStyle/>
           <a:p>
             <a:pPr algn="ctr"/>
+            <a:endParaRPr/>
           </a:p>
         </p:txBody>
       </p:sp>
@@ -13259,10 +13411,11 @@
           </a:fontRef>
         </p:style>
         <p:txBody>
-          <a:bodyPr rtlCol="0" anchor="ctr" wrap="square"/>
+          <a:bodyPr wrap="square" rtlCol="0" anchor="ctr"/>
           <a:lstStyle/>
           <a:p>
             <a:pPr algn="ctr"/>
+            <a:endParaRPr dirty="0"/>
           </a:p>
         </p:txBody>
       </p:sp>
@@ -13274,7 +13427,7 @@
         </p:nvSpPr>
         <p:spPr>
           <a:xfrm>
-            <a:off x="1097280" y="4937760"/>
+            <a:off x="1005840" y="4937760"/>
             <a:ext cx="3474720" cy="274320"/>
           </a:xfrm>
           <a:prstGeom prst="rect">
@@ -13283,7 +13436,7 @@
           <a:noFill/>
         </p:spPr>
         <p:txBody>
-          <a:bodyPr wrap="square" anchor="t" lIns="0" rIns="0" tIns="0" bIns="0">
+          <a:bodyPr wrap="square" lIns="0" tIns="0" rIns="0" bIns="0" anchor="t">
             <a:spAutoFit/>
           </a:bodyPr>
           <a:lstStyle/>
@@ -13322,7 +13475,7 @@
           <a:noFill/>
         </p:spPr>
         <p:txBody>
-          <a:bodyPr wrap="square" anchor="t" lIns="0" rIns="0" tIns="0" bIns="0">
+          <a:bodyPr wrap="square" lIns="0" tIns="0" rIns="0" bIns="0" anchor="t">
             <a:spAutoFit/>
           </a:bodyPr>
           <a:lstStyle/>
@@ -13361,7 +13514,7 @@
           <a:noFill/>
         </p:spPr>
         <p:txBody>
-          <a:bodyPr wrap="square" anchor="t" lIns="0" rIns="0" tIns="0" bIns="0">
+          <a:bodyPr wrap="square" lIns="0" tIns="0" rIns="0" bIns="0" anchor="t">
             <a:spAutoFit/>
           </a:bodyPr>
           <a:lstStyle/>
@@ -13392,7 +13545,7 @@
 </file>
 
 <file path=ppt/slides/slide6.xml><?xml version="1.0" encoding="utf-8"?>
-<p:sld xmlns:a="http://schemas.openxmlformats.org/drawingml/2006/main" xmlns:p="http://schemas.openxmlformats.org/presentationml/2006/main" xmlns:r="http://schemas.openxmlformats.org/officeDocument/2006/relationships">
+<p:sld xmlns:a="http://schemas.openxmlformats.org/drawingml/2006/main" xmlns:r="http://schemas.openxmlformats.org/officeDocument/2006/relationships" xmlns:p="http://schemas.openxmlformats.org/presentationml/2006/main">
   <p:cSld>
     <p:spTree>
       <p:nvGrpSpPr>
@@ -13400,7 +13553,14 @@
         <p:cNvGrpSpPr/>
         <p:nvPr/>
       </p:nvGrpSpPr>
-      <p:grpSpPr/>
+      <p:grpSpPr>
+        <a:xfrm>
+          <a:off x="0" y="0"/>
+          <a:ext cx="0" cy="0"/>
+          <a:chOff x="0" y="0"/>
+          <a:chExt cx="0" cy="0"/>
+        </a:xfrm>
+      </p:grpSpPr>
       <p:sp>
         <p:nvSpPr>
           <p:cNvPr id="2" name="Rectangle 1"/>
@@ -13442,6 +13602,7 @@
           <a:lstStyle/>
           <a:p>
             <a:pPr algn="ctr"/>
+            <a:endParaRPr/>
           </a:p>
         </p:txBody>
       </p:sp>
@@ -13462,7 +13623,7 @@
           <a:noFill/>
         </p:spPr>
         <p:txBody>
-          <a:bodyPr wrap="square" anchor="t" lIns="0" rIns="0" tIns="0" bIns="0">
+          <a:bodyPr wrap="square" lIns="0" tIns="0" rIns="0" bIns="0" anchor="t">
             <a:spAutoFit/>
           </a:bodyPr>
           <a:lstStyle/>
@@ -13501,7 +13662,7 @@
           <a:noFill/>
         </p:spPr>
         <p:txBody>
-          <a:bodyPr wrap="square" anchor="t" lIns="0" rIns="0" tIns="0" bIns="0">
+          <a:bodyPr wrap="square" lIns="0" tIns="0" rIns="0" bIns="0" anchor="t">
             <a:spAutoFit/>
           </a:bodyPr>
           <a:lstStyle/>
@@ -13564,6 +13725,7 @@
           <a:lstStyle/>
           <a:p>
             <a:pPr algn="ctr"/>
+            <a:endParaRPr/>
           </a:p>
         </p:txBody>
       </p:sp>
@@ -13584,7 +13746,7 @@
           <a:noFill/>
         </p:spPr>
         <p:txBody>
-          <a:bodyPr wrap="square" anchor="t" lIns="0" rIns="0" tIns="0" bIns="0">
+          <a:bodyPr wrap="square" lIns="0" tIns="0" rIns="0" bIns="0" anchor="t">
             <a:spAutoFit/>
           </a:bodyPr>
           <a:lstStyle/>
@@ -13647,7 +13809,7 @@
           <a:noFill/>
         </p:spPr>
         <p:txBody>
-          <a:bodyPr wrap="square" anchor="t" lIns="0" rIns="0" tIns="0" bIns="0">
+          <a:bodyPr wrap="square" lIns="0" tIns="0" rIns="0" bIns="0" anchor="t">
             <a:spAutoFit/>
           </a:bodyPr>
           <a:lstStyle/>
@@ -13710,7 +13872,7 @@
           <a:noFill/>
         </p:spPr>
         <p:txBody>
-          <a:bodyPr wrap="square" anchor="t" lIns="0" rIns="0" tIns="0" bIns="0">
+          <a:bodyPr wrap="square" lIns="0" tIns="0" rIns="0" bIns="0" anchor="t">
             <a:spAutoFit/>
           </a:bodyPr>
           <a:lstStyle/>
@@ -13773,7 +13935,7 @@
           <a:noFill/>
         </p:spPr>
         <p:txBody>
-          <a:bodyPr wrap="square" anchor="t" lIns="0" rIns="0" tIns="0" bIns="0">
+          <a:bodyPr wrap="square" lIns="0" tIns="0" rIns="0" bIns="0" anchor="t">
             <a:spAutoFit/>
           </a:bodyPr>
           <a:lstStyle/>
@@ -13836,7 +13998,7 @@
           <a:noFill/>
         </p:spPr>
         <p:txBody>
-          <a:bodyPr wrap="square" anchor="t" lIns="0" rIns="0" tIns="0" bIns="0">
+          <a:bodyPr wrap="square" lIns="0" tIns="0" rIns="0" bIns="0" anchor="t">
             <a:spAutoFit/>
           </a:bodyPr>
           <a:lstStyle/>
@@ -13867,7 +14029,7 @@
 </file>
 
 <file path=ppt/slides/slide7.xml><?xml version="1.0" encoding="utf-8"?>
-<p:sld xmlns:a="http://schemas.openxmlformats.org/drawingml/2006/main" xmlns:p="http://schemas.openxmlformats.org/presentationml/2006/main" xmlns:r="http://schemas.openxmlformats.org/officeDocument/2006/relationships">
+<p:sld xmlns:a="http://schemas.openxmlformats.org/drawingml/2006/main" xmlns:r="http://schemas.openxmlformats.org/officeDocument/2006/relationships" xmlns:p="http://schemas.openxmlformats.org/presentationml/2006/main">
   <p:cSld>
     <p:spTree>
       <p:nvGrpSpPr>
@@ -13875,7 +14037,14 @@
         <p:cNvGrpSpPr/>
         <p:nvPr/>
       </p:nvGrpSpPr>
-      <p:grpSpPr/>
+      <p:grpSpPr>
+        <a:xfrm>
+          <a:off x="0" y="0"/>
+          <a:ext cx="0" cy="0"/>
+          <a:chOff x="0" y="0"/>
+          <a:chExt cx="0" cy="0"/>
+        </a:xfrm>
+      </p:grpSpPr>
       <p:sp>
         <p:nvSpPr>
           <p:cNvPr id="2" name="Rectangle 1"/>
@@ -13917,6 +14086,7 @@
           <a:lstStyle/>
           <a:p>
             <a:pPr algn="ctr"/>
+            <a:endParaRPr/>
           </a:p>
         </p:txBody>
       </p:sp>
@@ -13937,7 +14107,7 @@
           <a:noFill/>
         </p:spPr>
         <p:txBody>
-          <a:bodyPr wrap="square" anchor="t" lIns="0" rIns="0" tIns="0" bIns="0">
+          <a:bodyPr wrap="square" lIns="0" tIns="0" rIns="0" bIns="0" anchor="t">
             <a:spAutoFit/>
           </a:bodyPr>
           <a:lstStyle/>
@@ -13976,7 +14146,7 @@
           <a:noFill/>
         </p:spPr>
         <p:txBody>
-          <a:bodyPr wrap="square" anchor="t" lIns="0" rIns="0" tIns="0" bIns="0">
+          <a:bodyPr wrap="square" lIns="0" tIns="0" rIns="0" bIns="0" anchor="t">
             <a:spAutoFit/>
           </a:bodyPr>
           <a:lstStyle/>
@@ -14039,6 +14209,7 @@
           <a:lstStyle/>
           <a:p>
             <a:pPr algn="ctr"/>
+            <a:endParaRPr/>
           </a:p>
         </p:txBody>
       </p:sp>
@@ -14059,7 +14230,7 @@
           <a:noFill/>
         </p:spPr>
         <p:txBody>
-          <a:bodyPr wrap="square" anchor="t" lIns="0" rIns="0" tIns="0" bIns="0">
+          <a:bodyPr wrap="square" lIns="0" tIns="0" rIns="0" bIns="0" anchor="t">
             <a:spAutoFit/>
           </a:bodyPr>
           <a:lstStyle/>
@@ -14098,7 +14269,7 @@
           <a:noFill/>
         </p:spPr>
         <p:txBody>
-          <a:bodyPr wrap="square" anchor="t" lIns="0" rIns="0" tIns="0" bIns="0">
+          <a:bodyPr wrap="square" lIns="0" tIns="0" rIns="0" bIns="0" anchor="t">
             <a:spAutoFit/>
           </a:bodyPr>
           <a:lstStyle/>
@@ -14161,10 +14332,11 @@
           </a:fontRef>
         </p:style>
         <p:txBody>
-          <a:bodyPr rtlCol="0" anchor="ctr" wrap="square"/>
+          <a:bodyPr wrap="square" rtlCol="0" anchor="ctr"/>
           <a:lstStyle/>
           <a:p>
             <a:pPr algn="ctr"/>
+            <a:endParaRPr/>
           </a:p>
         </p:txBody>
       </p:sp>
@@ -14185,7 +14357,7 @@
           <a:noFill/>
         </p:spPr>
         <p:txBody>
-          <a:bodyPr wrap="square" anchor="t" lIns="0" rIns="0" tIns="0" bIns="0">
+          <a:bodyPr wrap="square" lIns="0" tIns="0" rIns="0" bIns="0" anchor="t">
             <a:spAutoFit/>
           </a:bodyPr>
           <a:lstStyle/>
@@ -14224,7 +14396,7 @@
           <a:noFill/>
         </p:spPr>
         <p:txBody>
-          <a:bodyPr wrap="square" anchor="t" lIns="0" rIns="0" tIns="0" bIns="0">
+          <a:bodyPr wrap="square" lIns="0" tIns="0" rIns="0" bIns="0" anchor="t">
             <a:spAutoFit/>
           </a:bodyPr>
           <a:lstStyle/>
@@ -14288,10 +14460,11 @@
           </a:fontRef>
         </p:style>
         <p:txBody>
-          <a:bodyPr rtlCol="0" anchor="ctr" wrap="square"/>
+          <a:bodyPr wrap="square" rtlCol="0" anchor="ctr"/>
           <a:lstStyle/>
           <a:p>
             <a:pPr algn="ctr"/>
+            <a:endParaRPr/>
           </a:p>
         </p:txBody>
       </p:sp>
@@ -14312,7 +14485,7 @@
           <a:noFill/>
         </p:spPr>
         <p:txBody>
-          <a:bodyPr wrap="square" anchor="t" lIns="0" rIns="0" tIns="0" bIns="0">
+          <a:bodyPr wrap="square" lIns="0" tIns="0" rIns="0" bIns="0" anchor="t">
             <a:spAutoFit/>
           </a:bodyPr>
           <a:lstStyle/>
@@ -14351,7 +14524,7 @@
           <a:noFill/>
         </p:spPr>
         <p:txBody>
-          <a:bodyPr wrap="square" anchor="t" lIns="0" rIns="0" tIns="0" bIns="0">
+          <a:bodyPr wrap="square" lIns="0" tIns="0" rIns="0" bIns="0" anchor="t">
             <a:spAutoFit/>
           </a:bodyPr>
           <a:lstStyle/>
@@ -14415,10 +14588,11 @@
           </a:fontRef>
         </p:style>
         <p:txBody>
-          <a:bodyPr rtlCol="0" anchor="ctr" wrap="square"/>
+          <a:bodyPr wrap="square" rtlCol="0" anchor="ctr"/>
           <a:lstStyle/>
           <a:p>
             <a:pPr algn="ctr"/>
+            <a:endParaRPr/>
           </a:p>
         </p:txBody>
       </p:sp>
@@ -14439,7 +14613,7 @@
           <a:noFill/>
         </p:spPr>
         <p:txBody>
-          <a:bodyPr wrap="square" anchor="t" lIns="0" rIns="0" tIns="0" bIns="0">
+          <a:bodyPr wrap="square" lIns="0" tIns="0" rIns="0" bIns="0" anchor="t">
             <a:spAutoFit/>
           </a:bodyPr>
           <a:lstStyle/>
@@ -14478,7 +14652,7 @@
           <a:noFill/>
         </p:spPr>
         <p:txBody>
-          <a:bodyPr wrap="square" anchor="t" lIns="0" rIns="0" tIns="0" bIns="0">
+          <a:bodyPr wrap="square" lIns="0" tIns="0" rIns="0" bIns="0" anchor="t">
             <a:spAutoFit/>
           </a:bodyPr>
           <a:lstStyle/>
@@ -14542,10 +14716,11 @@
           </a:fontRef>
         </p:style>
         <p:txBody>
-          <a:bodyPr rtlCol="0" anchor="ctr" wrap="square"/>
+          <a:bodyPr wrap="square" rtlCol="0" anchor="ctr"/>
           <a:lstStyle/>
           <a:p>
             <a:pPr algn="ctr"/>
+            <a:endParaRPr/>
           </a:p>
         </p:txBody>
       </p:sp>
@@ -14566,7 +14741,7 @@
           <a:noFill/>
         </p:spPr>
         <p:txBody>
-          <a:bodyPr wrap="square" anchor="t" lIns="0" rIns="0" tIns="0" bIns="0">
+          <a:bodyPr wrap="square" lIns="0" tIns="0" rIns="0" bIns="0" anchor="t">
             <a:spAutoFit/>
           </a:bodyPr>
           <a:lstStyle/>
@@ -14605,7 +14780,7 @@
           <a:noFill/>
         </p:spPr>
         <p:txBody>
-          <a:bodyPr wrap="square" anchor="t" lIns="0" rIns="0" tIns="0" bIns="0">
+          <a:bodyPr wrap="square" lIns="0" tIns="0" rIns="0" bIns="0" anchor="t">
             <a:spAutoFit/>
           </a:bodyPr>
           <a:lstStyle/>
@@ -14645,7 +14820,7 @@
           <a:noFill/>
         </p:spPr>
         <p:txBody>
-          <a:bodyPr wrap="square" anchor="t" lIns="0" rIns="0" tIns="0" bIns="0">
+          <a:bodyPr wrap="square" lIns="0" tIns="0" rIns="0" bIns="0" anchor="t">
             <a:spAutoFit/>
           </a:bodyPr>
           <a:lstStyle/>
@@ -14684,7 +14859,7 @@
           <a:noFill/>
         </p:spPr>
         <p:txBody>
-          <a:bodyPr wrap="square" anchor="t" lIns="0" rIns="0" tIns="0" bIns="0">
+          <a:bodyPr wrap="square" lIns="0" tIns="0" rIns="0" bIns="0" anchor="t">
             <a:spAutoFit/>
           </a:bodyPr>
           <a:lstStyle/>
@@ -14780,7 +14955,7 @@
           <a:noFill/>
         </p:spPr>
         <p:txBody>
-          <a:bodyPr wrap="square" anchor="t" lIns="0" rIns="0" tIns="0" bIns="0">
+          <a:bodyPr wrap="square" lIns="0" tIns="0" rIns="0" bIns="0" anchor="t">
             <a:spAutoFit/>
           </a:bodyPr>
           <a:lstStyle/>
@@ -14819,7 +14994,7 @@
           <a:noFill/>
         </p:spPr>
         <p:txBody>
-          <a:bodyPr wrap="square" anchor="t" lIns="0" rIns="0" tIns="0" bIns="0">
+          <a:bodyPr wrap="square" lIns="0" tIns="0" rIns="0" bIns="0" anchor="t">
             <a:spAutoFit/>
           </a:bodyPr>
           <a:lstStyle/>
@@ -14858,7 +15033,7 @@
           <a:noFill/>
         </p:spPr>
         <p:txBody>
-          <a:bodyPr wrap="square" anchor="t" lIns="0" rIns="0" tIns="0" bIns="0">
+          <a:bodyPr wrap="square" lIns="0" tIns="0" rIns="0" bIns="0" anchor="t">
             <a:spAutoFit/>
           </a:bodyPr>
           <a:lstStyle/>
@@ -14897,7 +15072,7 @@
           <a:noFill/>
         </p:spPr>
         <p:txBody>
-          <a:bodyPr wrap="square" anchor="t" lIns="0" rIns="0" tIns="0" bIns="0">
+          <a:bodyPr wrap="square" lIns="0" tIns="0" rIns="0" bIns="0" anchor="t">
             <a:spAutoFit/>
           </a:bodyPr>
           <a:lstStyle/>
@@ -14936,7 +15111,7 @@
           <a:noFill/>
         </p:spPr>
         <p:txBody>
-          <a:bodyPr wrap="square" anchor="t" lIns="0" rIns="0" tIns="0" bIns="0">
+          <a:bodyPr wrap="square" lIns="0" tIns="0" rIns="0" bIns="0" anchor="t">
             <a:spAutoFit/>
           </a:bodyPr>
           <a:lstStyle/>
@@ -14975,7 +15150,7 @@
           <a:noFill/>
         </p:spPr>
         <p:txBody>
-          <a:bodyPr wrap="square" anchor="t" lIns="0" rIns="0" tIns="0" bIns="0">
+          <a:bodyPr wrap="square" lIns="0" tIns="0" rIns="0" bIns="0" anchor="t">
             <a:spAutoFit/>
           </a:bodyPr>
           <a:lstStyle/>
@@ -15014,7 +15189,7 @@
           <a:noFill/>
         </p:spPr>
         <p:txBody>
-          <a:bodyPr wrap="square" anchor="t" lIns="0" rIns="0" tIns="0" bIns="0">
+          <a:bodyPr wrap="square" lIns="0" tIns="0" rIns="0" bIns="0" anchor="t">
             <a:spAutoFit/>
           </a:bodyPr>
           <a:lstStyle/>
@@ -15053,7 +15228,7 @@
           <a:noFill/>
         </p:spPr>
         <p:txBody>
-          <a:bodyPr wrap="square" anchor="t" lIns="0" rIns="0" tIns="0" bIns="0">
+          <a:bodyPr wrap="square" lIns="0" tIns="0" rIns="0" bIns="0" anchor="t">
             <a:spAutoFit/>
           </a:bodyPr>
           <a:lstStyle/>
@@ -15092,7 +15267,7 @@
           <a:noFill/>
         </p:spPr>
         <p:txBody>
-          <a:bodyPr wrap="square" anchor="t" lIns="0" rIns="0" tIns="0" bIns="0">
+          <a:bodyPr wrap="square" lIns="0" tIns="0" rIns="0" bIns="0" anchor="t">
             <a:spAutoFit/>
           </a:bodyPr>
           <a:lstStyle/>
@@ -15131,7 +15306,7 @@
           <a:noFill/>
         </p:spPr>
         <p:txBody>
-          <a:bodyPr wrap="square" anchor="t" lIns="0" rIns="0" tIns="0" bIns="0">
+          <a:bodyPr wrap="square" lIns="0" tIns="0" rIns="0" bIns="0" anchor="t">
             <a:spAutoFit/>
           </a:bodyPr>
           <a:lstStyle/>
@@ -15170,7 +15345,7 @@
           <a:noFill/>
         </p:spPr>
         <p:txBody>
-          <a:bodyPr wrap="square" anchor="t" lIns="0" rIns="0" tIns="0" bIns="0">
+          <a:bodyPr wrap="square" lIns="0" tIns="0" rIns="0" bIns="0" anchor="t">
             <a:spAutoFit/>
           </a:bodyPr>
           <a:lstStyle/>
@@ -15201,7 +15376,7 @@
 </file>
 
 <file path=ppt/slides/slide8.xml><?xml version="1.0" encoding="utf-8"?>
-<p:sld xmlns:a="http://schemas.openxmlformats.org/drawingml/2006/main" xmlns:p="http://schemas.openxmlformats.org/presentationml/2006/main" xmlns:r="http://schemas.openxmlformats.org/officeDocument/2006/relationships">
+<p:sld xmlns:a="http://schemas.openxmlformats.org/drawingml/2006/main" xmlns:r="http://schemas.openxmlformats.org/officeDocument/2006/relationships" xmlns:p="http://schemas.openxmlformats.org/presentationml/2006/main">
   <p:cSld>
     <p:spTree>
       <p:nvGrpSpPr>
@@ -15209,7 +15384,14 @@
         <p:cNvGrpSpPr/>
         <p:nvPr/>
       </p:nvGrpSpPr>
-      <p:grpSpPr/>
+      <p:grpSpPr>
+        <a:xfrm>
+          <a:off x="0" y="0"/>
+          <a:ext cx="0" cy="0"/>
+          <a:chOff x="0" y="0"/>
+          <a:chExt cx="0" cy="0"/>
+        </a:xfrm>
+      </p:grpSpPr>
       <p:sp>
         <p:nvSpPr>
           <p:cNvPr id="2" name="Rectangle 1"/>
@@ -15251,6 +15433,7 @@
           <a:lstStyle/>
           <a:p>
             <a:pPr algn="ctr"/>
+            <a:endParaRPr/>
           </a:p>
         </p:txBody>
       </p:sp>
@@ -15271,7 +15454,7 @@
           <a:noFill/>
         </p:spPr>
         <p:txBody>
-          <a:bodyPr wrap="square" anchor="t" lIns="0" rIns="0" tIns="0" bIns="0">
+          <a:bodyPr wrap="square" lIns="0" tIns="0" rIns="0" bIns="0" anchor="t">
             <a:spAutoFit/>
           </a:bodyPr>
           <a:lstStyle/>
@@ -15310,7 +15493,7 @@
           <a:noFill/>
         </p:spPr>
         <p:txBody>
-          <a:bodyPr wrap="square" anchor="t" lIns="0" rIns="0" tIns="0" bIns="0">
+          <a:bodyPr wrap="square" lIns="0" tIns="0" rIns="0" bIns="0" anchor="t">
             <a:spAutoFit/>
           </a:bodyPr>
           <a:lstStyle/>
@@ -15373,6 +15556,7 @@
           <a:lstStyle/>
           <a:p>
             <a:pPr algn="ctr"/>
+            <a:endParaRPr/>
           </a:p>
         </p:txBody>
       </p:sp>
@@ -15393,7 +15577,7 @@
           <a:noFill/>
         </p:spPr>
         <p:txBody>
-          <a:bodyPr wrap="square" anchor="t" lIns="0" rIns="0" tIns="0" bIns="0">
+          <a:bodyPr wrap="square" lIns="0" tIns="0" rIns="0" bIns="0" anchor="t">
             <a:spAutoFit/>
           </a:bodyPr>
           <a:lstStyle/>
@@ -15432,7 +15616,7 @@
           <a:noFill/>
         </p:spPr>
         <p:txBody>
-          <a:bodyPr wrap="square" anchor="t" lIns="0" rIns="0" tIns="0" bIns="0">
+          <a:bodyPr wrap="square" lIns="0" tIns="0" rIns="0" bIns="0" anchor="t">
             <a:spAutoFit/>
           </a:bodyPr>
           <a:lstStyle/>
@@ -15472,7 +15656,7 @@
           <a:noFill/>
         </p:spPr>
         <p:txBody>
-          <a:bodyPr wrap="square" anchor="t" lIns="0" rIns="0" tIns="0" bIns="0">
+          <a:bodyPr wrap="square" lIns="0" tIns="0" rIns="0" bIns="0" anchor="t">
             <a:spAutoFit/>
           </a:bodyPr>
           <a:lstStyle/>
@@ -15512,7 +15696,7 @@
           <a:noFill/>
         </p:spPr>
         <p:txBody>
-          <a:bodyPr wrap="square" anchor="t" lIns="0" rIns="0" tIns="0" bIns="0">
+          <a:bodyPr wrap="square" lIns="0" tIns="0" rIns="0" bIns="0" anchor="t">
             <a:spAutoFit/>
           </a:bodyPr>
           <a:lstStyle/>
@@ -15552,7 +15736,7 @@
           <a:noFill/>
         </p:spPr>
         <p:txBody>
-          <a:bodyPr wrap="square" anchor="t" lIns="0" rIns="0" tIns="0" bIns="0">
+          <a:bodyPr wrap="square" lIns="0" tIns="0" rIns="0" bIns="0" anchor="t">
             <a:spAutoFit/>
           </a:bodyPr>
           <a:lstStyle/>
@@ -15592,7 +15776,7 @@
           <a:noFill/>
         </p:spPr>
         <p:txBody>
-          <a:bodyPr wrap="square" anchor="t" lIns="0" rIns="0" tIns="0" bIns="0">
+          <a:bodyPr wrap="square" lIns="0" tIns="0" rIns="0" bIns="0" anchor="t">
             <a:spAutoFit/>
           </a:bodyPr>
           <a:lstStyle/>
@@ -15656,10 +15840,11 @@
           </a:fontRef>
         </p:style>
         <p:txBody>
-          <a:bodyPr rtlCol="0" anchor="ctr" wrap="square"/>
+          <a:bodyPr wrap="square" rtlCol="0" anchor="ctr"/>
           <a:lstStyle/>
           <a:p>
             <a:pPr algn="ctr"/>
+            <a:endParaRPr/>
           </a:p>
         </p:txBody>
       </p:sp>
@@ -15680,7 +15865,7 @@
           <a:noFill/>
         </p:spPr>
         <p:txBody>
-          <a:bodyPr wrap="square" anchor="t" lIns="0" rIns="0" tIns="0" bIns="0">
+          <a:bodyPr wrap="square" lIns="0" tIns="0" rIns="0" bIns="0" anchor="t">
             <a:spAutoFit/>
           </a:bodyPr>
           <a:lstStyle/>
@@ -15719,7 +15904,7 @@
           <a:noFill/>
         </p:spPr>
         <p:txBody>
-          <a:bodyPr wrap="square" anchor="t" lIns="0" rIns="0" tIns="0" bIns="0">
+          <a:bodyPr wrap="square" lIns="0" tIns="0" rIns="0" bIns="0" anchor="t">
             <a:spAutoFit/>
           </a:bodyPr>
           <a:lstStyle/>
@@ -15758,7 +15943,7 @@
           <a:noFill/>
         </p:spPr>
         <p:txBody>
-          <a:bodyPr wrap="square" anchor="t" lIns="0" rIns="0" tIns="0" bIns="0">
+          <a:bodyPr wrap="square" lIns="0" tIns="0" rIns="0" bIns="0" anchor="t">
             <a:spAutoFit/>
           </a:bodyPr>
           <a:lstStyle/>
@@ -15797,7 +15982,7 @@
           <a:noFill/>
         </p:spPr>
         <p:txBody>
-          <a:bodyPr wrap="square" anchor="t" lIns="0" rIns="0" tIns="0" bIns="0">
+          <a:bodyPr wrap="square" lIns="0" tIns="0" rIns="0" bIns="0" anchor="t">
             <a:spAutoFit/>
           </a:bodyPr>
           <a:lstStyle/>
@@ -15836,7 +16021,7 @@
           <a:noFill/>
         </p:spPr>
         <p:txBody>
-          <a:bodyPr wrap="square" anchor="t" lIns="0" rIns="0" tIns="0" bIns="0">
+          <a:bodyPr wrap="square" lIns="0" tIns="0" rIns="0" bIns="0" anchor="t">
             <a:spAutoFit/>
           </a:bodyPr>
           <a:lstStyle/>
@@ -15875,7 +16060,7 @@
           <a:noFill/>
         </p:spPr>
         <p:txBody>
-          <a:bodyPr wrap="square" anchor="t" lIns="0" rIns="0" tIns="0" bIns="0">
+          <a:bodyPr wrap="square" lIns="0" tIns="0" rIns="0" bIns="0" anchor="t">
             <a:spAutoFit/>
           </a:bodyPr>
           <a:lstStyle/>
@@ -15914,7 +16099,7 @@
           <a:noFill/>
         </p:spPr>
         <p:txBody>
-          <a:bodyPr wrap="square" anchor="t" lIns="0" rIns="0" tIns="0" bIns="0">
+          <a:bodyPr wrap="square" lIns="0" tIns="0" rIns="0" bIns="0" anchor="t">
             <a:spAutoFit/>
           </a:bodyPr>
           <a:lstStyle/>
@@ -15977,10 +16162,11 @@
           </a:fontRef>
         </p:style>
         <p:txBody>
-          <a:bodyPr rtlCol="0" anchor="ctr" wrap="square"/>
+          <a:bodyPr wrap="square" rtlCol="0" anchor="ctr"/>
           <a:lstStyle/>
           <a:p>
             <a:pPr algn="ctr"/>
+            <a:endParaRPr/>
           </a:p>
         </p:txBody>
       </p:sp>
@@ -16001,7 +16187,7 @@
           <a:noFill/>
         </p:spPr>
         <p:txBody>
-          <a:bodyPr wrap="square" anchor="t" lIns="0" rIns="0" tIns="0" bIns="0">
+          <a:bodyPr wrap="square" lIns="0" tIns="0" rIns="0" bIns="0" anchor="t">
             <a:spAutoFit/>
           </a:bodyPr>
           <a:lstStyle/>
@@ -16040,7 +16226,7 @@
           <a:noFill/>
         </p:spPr>
         <p:txBody>
-          <a:bodyPr wrap="square" anchor="t" lIns="0" rIns="0" tIns="0" bIns="0">
+          <a:bodyPr wrap="square" lIns="0" tIns="0" rIns="0" bIns="0" anchor="t">
             <a:spAutoFit/>
           </a:bodyPr>
           <a:lstStyle/>
@@ -16079,7 +16265,7 @@
           <a:noFill/>
         </p:spPr>
         <p:txBody>
-          <a:bodyPr wrap="square" anchor="t" lIns="0" rIns="0" tIns="0" bIns="0">
+          <a:bodyPr wrap="square" lIns="0" tIns="0" rIns="0" bIns="0" anchor="t">
             <a:spAutoFit/>
           </a:bodyPr>
           <a:lstStyle/>
@@ -16118,7 +16304,7 @@
           <a:noFill/>
         </p:spPr>
         <p:txBody>
-          <a:bodyPr wrap="square" anchor="t" lIns="0" rIns="0" tIns="0" bIns="0">
+          <a:bodyPr wrap="square" lIns="0" tIns="0" rIns="0" bIns="0" anchor="t">
             <a:spAutoFit/>
           </a:bodyPr>
           <a:lstStyle/>
@@ -16157,7 +16343,7 @@
           <a:noFill/>
         </p:spPr>
         <p:txBody>
-          <a:bodyPr wrap="square" anchor="t" lIns="0" rIns="0" tIns="0" bIns="0">
+          <a:bodyPr wrap="square" lIns="0" tIns="0" rIns="0" bIns="0" anchor="t">
             <a:spAutoFit/>
           </a:bodyPr>
           <a:lstStyle/>
@@ -16196,7 +16382,7 @@
           <a:noFill/>
         </p:spPr>
         <p:txBody>
-          <a:bodyPr wrap="square" anchor="t" lIns="0" rIns="0" tIns="0" bIns="0">
+          <a:bodyPr wrap="square" lIns="0" tIns="0" rIns="0" bIns="0" anchor="t">
             <a:spAutoFit/>
           </a:bodyPr>
           <a:lstStyle/>
@@ -16235,7 +16421,7 @@
           <a:noFill/>
         </p:spPr>
         <p:txBody>
-          <a:bodyPr wrap="square" anchor="t" lIns="0" rIns="0" tIns="0" bIns="0">
+          <a:bodyPr wrap="square" lIns="0" tIns="0" rIns="0" bIns="0" anchor="t">
             <a:spAutoFit/>
           </a:bodyPr>
           <a:lstStyle/>
@@ -16298,10 +16484,11 @@
           </a:fontRef>
         </p:style>
         <p:txBody>
-          <a:bodyPr rtlCol="0" anchor="ctr" wrap="square"/>
+          <a:bodyPr wrap="square" rtlCol="0" anchor="ctr"/>
           <a:lstStyle/>
           <a:p>
             <a:pPr algn="ctr"/>
+            <a:endParaRPr/>
           </a:p>
         </p:txBody>
       </p:sp>
@@ -16322,7 +16509,7 @@
           <a:noFill/>
         </p:spPr>
         <p:txBody>
-          <a:bodyPr wrap="square" anchor="t" lIns="0" rIns="0" tIns="0" bIns="0">
+          <a:bodyPr wrap="square" lIns="0" tIns="0" rIns="0" bIns="0" anchor="t">
             <a:spAutoFit/>
           </a:bodyPr>
           <a:lstStyle/>
@@ -16361,7 +16548,7 @@
           <a:noFill/>
         </p:spPr>
         <p:txBody>
-          <a:bodyPr wrap="square" anchor="t" lIns="0" rIns="0" tIns="0" bIns="0">
+          <a:bodyPr wrap="square" lIns="0" tIns="0" rIns="0" bIns="0" anchor="t">
             <a:spAutoFit/>
           </a:bodyPr>
           <a:lstStyle/>
@@ -16400,7 +16587,7 @@
           <a:noFill/>
         </p:spPr>
         <p:txBody>
-          <a:bodyPr wrap="square" anchor="t" lIns="0" rIns="0" tIns="0" bIns="0">
+          <a:bodyPr wrap="square" lIns="0" tIns="0" rIns="0" bIns="0" anchor="t">
             <a:spAutoFit/>
           </a:bodyPr>
           <a:lstStyle/>
@@ -16439,7 +16626,7 @@
           <a:noFill/>
         </p:spPr>
         <p:txBody>
-          <a:bodyPr wrap="square" anchor="t" lIns="0" rIns="0" tIns="0" bIns="0">
+          <a:bodyPr wrap="square" lIns="0" tIns="0" rIns="0" bIns="0" anchor="t">
             <a:spAutoFit/>
           </a:bodyPr>
           <a:lstStyle/>
@@ -16478,7 +16665,7 @@
           <a:noFill/>
         </p:spPr>
         <p:txBody>
-          <a:bodyPr wrap="square" anchor="t" lIns="0" rIns="0" tIns="0" bIns="0">
+          <a:bodyPr wrap="square" lIns="0" tIns="0" rIns="0" bIns="0" anchor="t">
             <a:spAutoFit/>
           </a:bodyPr>
           <a:lstStyle/>
@@ -16517,7 +16704,7 @@
           <a:noFill/>
         </p:spPr>
         <p:txBody>
-          <a:bodyPr wrap="square" anchor="t" lIns="0" rIns="0" tIns="0" bIns="0">
+          <a:bodyPr wrap="square" lIns="0" tIns="0" rIns="0" bIns="0" anchor="t">
             <a:spAutoFit/>
           </a:bodyPr>
           <a:lstStyle/>
@@ -16556,7 +16743,7 @@
           <a:noFill/>
         </p:spPr>
         <p:txBody>
-          <a:bodyPr wrap="square" anchor="t" lIns="0" rIns="0" tIns="0" bIns="0">
+          <a:bodyPr wrap="square" lIns="0" tIns="0" rIns="0" bIns="0" anchor="t">
             <a:spAutoFit/>
           </a:bodyPr>
           <a:lstStyle/>
@@ -16619,10 +16806,11 @@
           </a:fontRef>
         </p:style>
         <p:txBody>
-          <a:bodyPr rtlCol="0" anchor="ctr" wrap="square"/>
+          <a:bodyPr wrap="square" rtlCol="0" anchor="ctr"/>
           <a:lstStyle/>
           <a:p>
             <a:pPr algn="ctr"/>
+            <a:endParaRPr/>
           </a:p>
         </p:txBody>
       </p:sp>
@@ -16643,7 +16831,7 @@
           <a:noFill/>
         </p:spPr>
         <p:txBody>
-          <a:bodyPr wrap="square" anchor="t" lIns="0" rIns="0" tIns="0" bIns="0">
+          <a:bodyPr wrap="square" lIns="0" tIns="0" rIns="0" bIns="0" anchor="t">
             <a:spAutoFit/>
           </a:bodyPr>
           <a:lstStyle/>
@@ -16682,7 +16870,7 @@
           <a:noFill/>
         </p:spPr>
         <p:txBody>
-          <a:bodyPr wrap="square" anchor="t" lIns="0" rIns="0" tIns="0" bIns="0">
+          <a:bodyPr wrap="square" lIns="0" tIns="0" rIns="0" bIns="0" anchor="t">
             <a:spAutoFit/>
           </a:bodyPr>
           <a:lstStyle/>
@@ -16721,7 +16909,7 @@
           <a:noFill/>
         </p:spPr>
         <p:txBody>
-          <a:bodyPr wrap="square" anchor="t" lIns="0" rIns="0" tIns="0" bIns="0">
+          <a:bodyPr wrap="square" lIns="0" tIns="0" rIns="0" bIns="0" anchor="t">
             <a:spAutoFit/>
           </a:bodyPr>
           <a:lstStyle/>
@@ -16760,7 +16948,7 @@
           <a:noFill/>
         </p:spPr>
         <p:txBody>
-          <a:bodyPr wrap="square" anchor="t" lIns="0" rIns="0" tIns="0" bIns="0">
+          <a:bodyPr wrap="square" lIns="0" tIns="0" rIns="0" bIns="0" anchor="t">
             <a:spAutoFit/>
           </a:bodyPr>
           <a:lstStyle/>
@@ -16799,7 +16987,7 @@
           <a:noFill/>
         </p:spPr>
         <p:txBody>
-          <a:bodyPr wrap="square" anchor="t" lIns="0" rIns="0" tIns="0" bIns="0">
+          <a:bodyPr wrap="square" lIns="0" tIns="0" rIns="0" bIns="0" anchor="t">
             <a:spAutoFit/>
           </a:bodyPr>
           <a:lstStyle/>
@@ -16838,7 +17026,7 @@
           <a:noFill/>
         </p:spPr>
         <p:txBody>
-          <a:bodyPr wrap="square" anchor="t" lIns="0" rIns="0" tIns="0" bIns="0">
+          <a:bodyPr wrap="square" lIns="0" tIns="0" rIns="0" bIns="0" anchor="t">
             <a:spAutoFit/>
           </a:bodyPr>
           <a:lstStyle/>
@@ -16877,7 +17065,7 @@
           <a:noFill/>
         </p:spPr>
         <p:txBody>
-          <a:bodyPr wrap="square" anchor="t" lIns="0" rIns="0" tIns="0" bIns="0">
+          <a:bodyPr wrap="square" lIns="0" tIns="0" rIns="0" bIns="0" anchor="t">
             <a:spAutoFit/>
           </a:bodyPr>
           <a:lstStyle/>
@@ -16916,7 +17104,7 @@
           <a:noFill/>
         </p:spPr>
         <p:txBody>
-          <a:bodyPr wrap="square" anchor="t" lIns="0" rIns="0" tIns="0" bIns="0">
+          <a:bodyPr wrap="square" lIns="0" tIns="0" rIns="0" bIns="0" anchor="t">
             <a:spAutoFit/>
           </a:bodyPr>
           <a:lstStyle/>
@@ -16947,7 +17135,7 @@
 </file>
 
 <file path=ppt/slides/slide9.xml><?xml version="1.0" encoding="utf-8"?>
-<p:sld xmlns:a="http://schemas.openxmlformats.org/drawingml/2006/main" xmlns:p="http://schemas.openxmlformats.org/presentationml/2006/main" xmlns:r="http://schemas.openxmlformats.org/officeDocument/2006/relationships">
+<p:sld xmlns:a="http://schemas.openxmlformats.org/drawingml/2006/main" xmlns:r="http://schemas.openxmlformats.org/officeDocument/2006/relationships" xmlns:p="http://schemas.openxmlformats.org/presentationml/2006/main">
   <p:cSld>
     <p:spTree>
       <p:nvGrpSpPr>
@@ -16955,7 +17143,14 @@
         <p:cNvGrpSpPr/>
         <p:nvPr/>
       </p:nvGrpSpPr>
-      <p:grpSpPr/>
+      <p:grpSpPr>
+        <a:xfrm>
+          <a:off x="0" y="0"/>
+          <a:ext cx="0" cy="0"/>
+          <a:chOff x="0" y="0"/>
+          <a:chExt cx="0" cy="0"/>
+        </a:xfrm>
+      </p:grpSpPr>
       <p:sp>
         <p:nvSpPr>
           <p:cNvPr id="2" name="Rectangle 1"/>
@@ -16997,6 +17192,7 @@
           <a:lstStyle/>
           <a:p>
             <a:pPr algn="ctr"/>
+            <a:endParaRPr/>
           </a:p>
         </p:txBody>
       </p:sp>
@@ -17017,7 +17213,7 @@
           <a:noFill/>
         </p:spPr>
         <p:txBody>
-          <a:bodyPr wrap="square" anchor="t" lIns="0" rIns="0" tIns="0" bIns="0">
+          <a:bodyPr wrap="square" lIns="0" tIns="0" rIns="0" bIns="0" anchor="t">
             <a:spAutoFit/>
           </a:bodyPr>
           <a:lstStyle/>
@@ -17056,7 +17252,7 @@
           <a:noFill/>
         </p:spPr>
         <p:txBody>
-          <a:bodyPr wrap="square" anchor="t" lIns="0" rIns="0" tIns="0" bIns="0">
+          <a:bodyPr wrap="square" lIns="0" tIns="0" rIns="0" bIns="0" anchor="t">
             <a:spAutoFit/>
           </a:bodyPr>
           <a:lstStyle/>
@@ -17119,6 +17315,7 @@
           <a:lstStyle/>
           <a:p>
             <a:pPr algn="ctr"/>
+            <a:endParaRPr/>
           </a:p>
         </p:txBody>
       </p:sp>
@@ -17139,7 +17336,7 @@
           <a:noFill/>
         </p:spPr>
         <p:txBody>
-          <a:bodyPr wrap="square" anchor="t" lIns="0" rIns="0" tIns="0" bIns="0">
+          <a:bodyPr wrap="square" lIns="0" tIns="0" rIns="0" bIns="0" anchor="t">
             <a:spAutoFit/>
           </a:bodyPr>
           <a:lstStyle/>
@@ -17178,7 +17375,7 @@
           <a:noFill/>
         </p:spPr>
         <p:txBody>
-          <a:bodyPr wrap="square" anchor="t" lIns="0" rIns="0" tIns="0" bIns="0">
+          <a:bodyPr wrap="square" lIns="0" tIns="0" rIns="0" bIns="0" anchor="t">
             <a:spAutoFit/>
           </a:bodyPr>
           <a:lstStyle/>
@@ -17241,10 +17438,11 @@
           </a:fontRef>
         </p:style>
         <p:txBody>
-          <a:bodyPr rtlCol="0" anchor="ctr" wrap="square"/>
+          <a:bodyPr wrap="square" rtlCol="0" anchor="ctr"/>
           <a:lstStyle/>
           <a:p>
             <a:pPr algn="ctr"/>
+            <a:endParaRPr/>
           </a:p>
         </p:txBody>
       </p:sp>
@@ -17265,7 +17463,7 @@
           <a:noFill/>
         </p:spPr>
         <p:txBody>
-          <a:bodyPr wrap="square" anchor="t" lIns="0" rIns="0" tIns="0" bIns="0">
+          <a:bodyPr wrap="square" lIns="0" tIns="0" rIns="0" bIns="0" anchor="t">
             <a:spAutoFit/>
           </a:bodyPr>
           <a:lstStyle/>
@@ -17304,7 +17502,7 @@
           <a:noFill/>
         </p:spPr>
         <p:txBody>
-          <a:bodyPr wrap="square" anchor="t" lIns="0" rIns="0" tIns="0" bIns="0">
+          <a:bodyPr wrap="square" lIns="0" tIns="0" rIns="0" bIns="0" anchor="t">
             <a:spAutoFit/>
           </a:bodyPr>
           <a:lstStyle/>
@@ -17343,7 +17541,7 @@
           <a:noFill/>
         </p:spPr>
         <p:txBody>
-          <a:bodyPr wrap="square" anchor="t" lIns="0" rIns="0" tIns="0" bIns="0">
+          <a:bodyPr wrap="square" lIns="0" tIns="0" rIns="0" bIns="0" anchor="t">
             <a:spAutoFit/>
           </a:bodyPr>
           <a:lstStyle/>
@@ -17444,10 +17642,11 @@
           </a:fontRef>
         </p:style>
         <p:txBody>
-          <a:bodyPr rtlCol="0" anchor="ctr" wrap="square"/>
+          <a:bodyPr wrap="square" rtlCol="0" anchor="ctr"/>
           <a:lstStyle/>
           <a:p>
             <a:pPr algn="ctr"/>
+            <a:endParaRPr/>
           </a:p>
         </p:txBody>
       </p:sp>
@@ -17468,7 +17667,7 @@
           <a:noFill/>
         </p:spPr>
         <p:txBody>
-          <a:bodyPr wrap="square" anchor="t" lIns="0" rIns="0" tIns="0" bIns="0">
+          <a:bodyPr wrap="square" lIns="0" tIns="0" rIns="0" bIns="0" anchor="t">
             <a:spAutoFit/>
           </a:bodyPr>
           <a:lstStyle/>
@@ -17507,7 +17706,7 @@
           <a:noFill/>
         </p:spPr>
         <p:txBody>
-          <a:bodyPr wrap="square" anchor="t" lIns="0" rIns="0" tIns="0" bIns="0">
+          <a:bodyPr wrap="square" lIns="0" tIns="0" rIns="0" bIns="0" anchor="t">
             <a:spAutoFit/>
           </a:bodyPr>
           <a:lstStyle/>
@@ -17546,7 +17745,7 @@
           <a:noFill/>
         </p:spPr>
         <p:txBody>
-          <a:bodyPr wrap="square" anchor="t" lIns="0" rIns="0" tIns="0" bIns="0">
+          <a:bodyPr wrap="square" lIns="0" tIns="0" rIns="0" bIns="0" anchor="t">
             <a:spAutoFit/>
           </a:bodyPr>
           <a:lstStyle/>
@@ -17647,10 +17846,11 @@
           </a:fontRef>
         </p:style>
         <p:txBody>
-          <a:bodyPr rtlCol="0" anchor="ctr" wrap="square"/>
+          <a:bodyPr wrap="square" rtlCol="0" anchor="ctr"/>
           <a:lstStyle/>
           <a:p>
             <a:pPr algn="ctr"/>
+            <a:endParaRPr/>
           </a:p>
         </p:txBody>
       </p:sp>
@@ -17671,7 +17871,7 @@
           <a:noFill/>
         </p:spPr>
         <p:txBody>
-          <a:bodyPr wrap="square" anchor="t" lIns="0" rIns="0" tIns="0" bIns="0">
+          <a:bodyPr wrap="square" lIns="0" tIns="0" rIns="0" bIns="0" anchor="t">
             <a:spAutoFit/>
           </a:bodyPr>
           <a:lstStyle/>
@@ -17710,7 +17910,7 @@
           <a:noFill/>
         </p:spPr>
         <p:txBody>
-          <a:bodyPr wrap="square" anchor="t" lIns="0" rIns="0" tIns="0" bIns="0">
+          <a:bodyPr wrap="square" lIns="0" tIns="0" rIns="0" bIns="0" anchor="t">
             <a:spAutoFit/>
           </a:bodyPr>
           <a:lstStyle/>
@@ -17749,7 +17949,7 @@
           <a:noFill/>
         </p:spPr>
         <p:txBody>
-          <a:bodyPr wrap="square" anchor="t" lIns="0" rIns="0" tIns="0" bIns="0">
+          <a:bodyPr wrap="square" lIns="0" tIns="0" rIns="0" bIns="0" anchor="t">
             <a:spAutoFit/>
           </a:bodyPr>
           <a:lstStyle/>
@@ -17850,10 +18050,11 @@
           </a:fontRef>
         </p:style>
         <p:txBody>
-          <a:bodyPr rtlCol="0" anchor="ctr" wrap="square"/>
+          <a:bodyPr wrap="square" rtlCol="0" anchor="ctr"/>
           <a:lstStyle/>
           <a:p>
             <a:pPr algn="ctr"/>
+            <a:endParaRPr/>
           </a:p>
         </p:txBody>
       </p:sp>
@@ -17874,7 +18075,7 @@
           <a:noFill/>
         </p:spPr>
         <p:txBody>
-          <a:bodyPr wrap="square" anchor="t" lIns="0" rIns="0" tIns="0" bIns="0">
+          <a:bodyPr wrap="square" lIns="0" tIns="0" rIns="0" bIns="0" anchor="t">
             <a:spAutoFit/>
           </a:bodyPr>
           <a:lstStyle/>
